--- a/139788 Step 3 Dead-leg and Hold-up Retrofit_EN_1page.pptx
+++ b/139788 Step 3 Dead-leg and Hold-up Retrofit_EN_1page.pptx
@@ -1,13 +1,13 @@
 
 <file path=ppt/presentation.xml><?xml version="1.0" encoding="utf-8"?>
-<p:presentation xmlns:a="http://schemas.openxmlformats.org/drawingml/2006/main" xmlns:r="http://schemas.openxmlformats.org/officeDocument/2006/relationships" xmlns:p="http://schemas.openxmlformats.org/presentationml/2006/main" saveSubsetFonts="1" autoCompressPictures="0">
+<p:presentation xmlns:a="http://schemas.openxmlformats.org/drawingml/2006/main" xmlns:r="http://schemas.openxmlformats.org/officeDocument/2006/relationships" xmlns:p="http://schemas.openxmlformats.org/presentationml/2006/main" autoCompressPictures="0">
   <p:sldMasterIdLst>
     <p:sldMasterId id="2147483648" r:id="rId1"/>
   </p:sldMasterIdLst>
   <p:sldIdLst>
-    <p:sldId id="256" r:id="rId7"/>
+    <p:sldId id="256" r:id="rId3"/>
   </p:sldIdLst>
-  <p:sldSz cx="12191695" cy="6858000" type="screen4x3"/>
+  <p:sldSz cx="12191365" cy="6858000" type="screen4x3"/>
   <p:notesSz cx="6858000" cy="9144000"/>
   <p:defaultTextStyle>
     <a:defPPr>
@@ -104,6 +104,22 @@
       </a:defRPr>
     </a:lvl9pPr>
   </p:defaultTextStyle>
+  <p:extLst>
+    <p:ext uri="{EFAFB233-063F-42B5-8137-9DF3F51BA10A}">
+      <p15:sldGuideLst xmlns:p15="http://schemas.microsoft.com/office/powerpoint/2012/main">
+        <p15:guide id="1" orient="horz" pos="2160" userDrawn="1">
+          <p15:clr>
+            <a:srgbClr val="A4A3A4"/>
+          </p15:clr>
+        </p15:guide>
+        <p15:guide id="2" pos="2868" userDrawn="1">
+          <p15:clr>
+            <a:srgbClr val="A4A3A4"/>
+          </p15:clr>
+        </p15:guide>
+      </p15:sldGuideLst>
+    </p:ext>
+  </p:extLst>
 </p:presentation>
 </file>
 
@@ -288,7 +304,6 @@
           <a:p>
             <a:fld id="{5BCAD085-E8A6-8845-BD4E-CB4CCA059FC4}" type="datetimeFigureOut">
               <a:rPr lang="en-US" smtClean="0"/>
-              <a:t>1/27/13</a:t>
             </a:fld>
             <a:endParaRPr lang="en-US"/>
           </a:p>
@@ -330,18 +345,12 @@
           <a:p>
             <a:fld id="{C1FF6DA9-008F-8B48-92A6-B652298478BF}" type="slidenum">
               <a:rPr lang="en-US" smtClean="0"/>
-              <a:t>‹#›</a:t>
             </a:fld>
             <a:endParaRPr lang="en-US"/>
           </a:p>
         </p:txBody>
       </p:sp>
     </p:spTree>
-    <p:extLst>
-      <p:ext uri="{BB962C8B-B14F-4D97-AF65-F5344CB8AC3E}">
-        <p14:creationId xmlns:p14="http://schemas.microsoft.com/office/powerpoint/2010/main" val="3168075583"/>
-      </p:ext>
-    </p:extLst>
   </p:cSld>
   <p:clrMapOvr>
     <a:masterClrMapping/>
@@ -409,6 +418,7 @@
               <a:rPr lang="en-US" smtClean="0"/>
               <a:t>Click to edit Master text styles</a:t>
             </a:r>
+            <a:endParaRPr lang="en-US" smtClean="0"/>
           </a:p>
           <a:p>
             <a:pPr lvl="1"/>
@@ -416,6 +426,7 @@
               <a:rPr lang="en-US" smtClean="0"/>
               <a:t>Second level</a:t>
             </a:r>
+            <a:endParaRPr lang="en-US" smtClean="0"/>
           </a:p>
           <a:p>
             <a:pPr lvl="2"/>
@@ -423,6 +434,7 @@
               <a:rPr lang="en-US" smtClean="0"/>
               <a:t>Third level</a:t>
             </a:r>
+            <a:endParaRPr lang="en-US" smtClean="0"/>
           </a:p>
           <a:p>
             <a:pPr lvl="3"/>
@@ -430,6 +442,7 @@
               <a:rPr lang="en-US" smtClean="0"/>
               <a:t>Fourth level</a:t>
             </a:r>
+            <a:endParaRPr lang="en-US" smtClean="0"/>
           </a:p>
           <a:p>
             <a:pPr lvl="4"/>
@@ -458,7 +471,6 @@
           <a:p>
             <a:fld id="{5BCAD085-E8A6-8845-BD4E-CB4CCA059FC4}" type="datetimeFigureOut">
               <a:rPr lang="en-US" smtClean="0"/>
-              <a:t>1/27/13</a:t>
             </a:fld>
             <a:endParaRPr lang="en-US"/>
           </a:p>
@@ -500,18 +512,12 @@
           <a:p>
             <a:fld id="{C1FF6DA9-008F-8B48-92A6-B652298478BF}" type="slidenum">
               <a:rPr lang="en-US" smtClean="0"/>
-              <a:t>‹#›</a:t>
             </a:fld>
             <a:endParaRPr lang="en-US"/>
           </a:p>
         </p:txBody>
       </p:sp>
     </p:spTree>
-    <p:extLst>
-      <p:ext uri="{BB962C8B-B14F-4D97-AF65-F5344CB8AC3E}">
-        <p14:creationId xmlns:p14="http://schemas.microsoft.com/office/powerpoint/2010/main" val="2910927964"/>
-      </p:ext>
-    </p:extLst>
   </p:cSld>
   <p:clrMapOvr>
     <a:masterClrMapping/>
@@ -589,6 +595,7 @@
               <a:rPr lang="en-US" smtClean="0"/>
               <a:t>Click to edit Master text styles</a:t>
             </a:r>
+            <a:endParaRPr lang="en-US" smtClean="0"/>
           </a:p>
           <a:p>
             <a:pPr lvl="1"/>
@@ -596,6 +603,7 @@
               <a:rPr lang="en-US" smtClean="0"/>
               <a:t>Second level</a:t>
             </a:r>
+            <a:endParaRPr lang="en-US" smtClean="0"/>
           </a:p>
           <a:p>
             <a:pPr lvl="2"/>
@@ -603,6 +611,7 @@
               <a:rPr lang="en-US" smtClean="0"/>
               <a:t>Third level</a:t>
             </a:r>
+            <a:endParaRPr lang="en-US" smtClean="0"/>
           </a:p>
           <a:p>
             <a:pPr lvl="3"/>
@@ -610,6 +619,7 @@
               <a:rPr lang="en-US" smtClean="0"/>
               <a:t>Fourth level</a:t>
             </a:r>
+            <a:endParaRPr lang="en-US" smtClean="0"/>
           </a:p>
           <a:p>
             <a:pPr lvl="4"/>
@@ -638,7 +648,6 @@
           <a:p>
             <a:fld id="{5BCAD085-E8A6-8845-BD4E-CB4CCA059FC4}" type="datetimeFigureOut">
               <a:rPr lang="en-US" smtClean="0"/>
-              <a:t>1/27/13</a:t>
             </a:fld>
             <a:endParaRPr lang="en-US"/>
           </a:p>
@@ -680,18 +689,12 @@
           <a:p>
             <a:fld id="{C1FF6DA9-008F-8B48-92A6-B652298478BF}" type="slidenum">
               <a:rPr lang="en-US" smtClean="0"/>
-              <a:t>‹#›</a:t>
             </a:fld>
             <a:endParaRPr lang="en-US"/>
           </a:p>
         </p:txBody>
       </p:sp>
     </p:spTree>
-    <p:extLst>
-      <p:ext uri="{BB962C8B-B14F-4D97-AF65-F5344CB8AC3E}">
-        <p14:creationId xmlns:p14="http://schemas.microsoft.com/office/powerpoint/2010/main" val="3612223792"/>
-      </p:ext>
-    </p:extLst>
   </p:cSld>
   <p:clrMapOvr>
     <a:masterClrMapping/>
@@ -759,6 +762,7 @@
               <a:rPr lang="en-US" smtClean="0"/>
               <a:t>Click to edit Master text styles</a:t>
             </a:r>
+            <a:endParaRPr lang="en-US" smtClean="0"/>
           </a:p>
           <a:p>
             <a:pPr lvl="1"/>
@@ -766,6 +770,7 @@
               <a:rPr lang="en-US" smtClean="0"/>
               <a:t>Second level</a:t>
             </a:r>
+            <a:endParaRPr lang="en-US" smtClean="0"/>
           </a:p>
           <a:p>
             <a:pPr lvl="2"/>
@@ -773,6 +778,7 @@
               <a:rPr lang="en-US" smtClean="0"/>
               <a:t>Third level</a:t>
             </a:r>
+            <a:endParaRPr lang="en-US" smtClean="0"/>
           </a:p>
           <a:p>
             <a:pPr lvl="3"/>
@@ -780,6 +786,7 @@
               <a:rPr lang="en-US" smtClean="0"/>
               <a:t>Fourth level</a:t>
             </a:r>
+            <a:endParaRPr lang="en-US" smtClean="0"/>
           </a:p>
           <a:p>
             <a:pPr lvl="4"/>
@@ -808,7 +815,6 @@
           <a:p>
             <a:fld id="{5BCAD085-E8A6-8845-BD4E-CB4CCA059FC4}" type="datetimeFigureOut">
               <a:rPr lang="en-US" smtClean="0"/>
-              <a:t>1/27/13</a:t>
             </a:fld>
             <a:endParaRPr lang="en-US"/>
           </a:p>
@@ -850,18 +856,12 @@
           <a:p>
             <a:fld id="{C1FF6DA9-008F-8B48-92A6-B652298478BF}" type="slidenum">
               <a:rPr lang="en-US" smtClean="0"/>
-              <a:t>‹#›</a:t>
             </a:fld>
             <a:endParaRPr lang="en-US"/>
           </a:p>
         </p:txBody>
       </p:sp>
     </p:spTree>
-    <p:extLst>
-      <p:ext uri="{BB962C8B-B14F-4D97-AF65-F5344CB8AC3E}">
-        <p14:creationId xmlns:p14="http://schemas.microsoft.com/office/powerpoint/2010/main" val="2614314258"/>
-      </p:ext>
-    </p:extLst>
   </p:cSld>
   <p:clrMapOvr>
     <a:masterClrMapping/>
@@ -1034,6 +1034,7 @@
               <a:rPr lang="en-US" smtClean="0"/>
               <a:t>Click to edit Master text styles</a:t>
             </a:r>
+            <a:endParaRPr lang="en-US" smtClean="0"/>
           </a:p>
         </p:txBody>
       </p:sp>
@@ -1054,7 +1055,6 @@
           <a:p>
             <a:fld id="{5BCAD085-E8A6-8845-BD4E-CB4CCA059FC4}" type="datetimeFigureOut">
               <a:rPr lang="en-US" smtClean="0"/>
-              <a:t>1/27/13</a:t>
             </a:fld>
             <a:endParaRPr lang="en-US"/>
           </a:p>
@@ -1096,18 +1096,12 @@
           <a:p>
             <a:fld id="{C1FF6DA9-008F-8B48-92A6-B652298478BF}" type="slidenum">
               <a:rPr lang="en-US" smtClean="0"/>
-              <a:t>‹#›</a:t>
             </a:fld>
             <a:endParaRPr lang="en-US"/>
           </a:p>
         </p:txBody>
       </p:sp>
     </p:spTree>
-    <p:extLst>
-      <p:ext uri="{BB962C8B-B14F-4D97-AF65-F5344CB8AC3E}">
-        <p14:creationId xmlns:p14="http://schemas.microsoft.com/office/powerpoint/2010/main" val="960648375"/>
-      </p:ext>
-    </p:extLst>
   </p:cSld>
   <p:clrMapOvr>
     <a:masterClrMapping/>
@@ -1208,6 +1202,7 @@
               <a:rPr lang="en-US" smtClean="0"/>
               <a:t>Click to edit Master text styles</a:t>
             </a:r>
+            <a:endParaRPr lang="en-US" smtClean="0"/>
           </a:p>
           <a:p>
             <a:pPr lvl="1"/>
@@ -1215,6 +1210,7 @@
               <a:rPr lang="en-US" smtClean="0"/>
               <a:t>Second level</a:t>
             </a:r>
+            <a:endParaRPr lang="en-US" smtClean="0"/>
           </a:p>
           <a:p>
             <a:pPr lvl="2"/>
@@ -1222,6 +1218,7 @@
               <a:rPr lang="en-US" smtClean="0"/>
               <a:t>Third level</a:t>
             </a:r>
+            <a:endParaRPr lang="en-US" smtClean="0"/>
           </a:p>
           <a:p>
             <a:pPr lvl="3"/>
@@ -1229,6 +1226,7 @@
               <a:rPr lang="en-US" smtClean="0"/>
               <a:t>Fourth level</a:t>
             </a:r>
+            <a:endParaRPr lang="en-US" smtClean="0"/>
           </a:p>
           <a:p>
             <a:pPr lvl="4"/>
@@ -1293,6 +1291,7 @@
               <a:rPr lang="en-US" smtClean="0"/>
               <a:t>Click to edit Master text styles</a:t>
             </a:r>
+            <a:endParaRPr lang="en-US" smtClean="0"/>
           </a:p>
           <a:p>
             <a:pPr lvl="1"/>
@@ -1300,6 +1299,7 @@
               <a:rPr lang="en-US" smtClean="0"/>
               <a:t>Second level</a:t>
             </a:r>
+            <a:endParaRPr lang="en-US" smtClean="0"/>
           </a:p>
           <a:p>
             <a:pPr lvl="2"/>
@@ -1307,6 +1307,7 @@
               <a:rPr lang="en-US" smtClean="0"/>
               <a:t>Third level</a:t>
             </a:r>
+            <a:endParaRPr lang="en-US" smtClean="0"/>
           </a:p>
           <a:p>
             <a:pPr lvl="3"/>
@@ -1314,6 +1315,7 @@
               <a:rPr lang="en-US" smtClean="0"/>
               <a:t>Fourth level</a:t>
             </a:r>
+            <a:endParaRPr lang="en-US" smtClean="0"/>
           </a:p>
           <a:p>
             <a:pPr lvl="4"/>
@@ -1342,7 +1344,6 @@
           <a:p>
             <a:fld id="{5BCAD085-E8A6-8845-BD4E-CB4CCA059FC4}" type="datetimeFigureOut">
               <a:rPr lang="en-US" smtClean="0"/>
-              <a:t>1/27/13</a:t>
             </a:fld>
             <a:endParaRPr lang="en-US"/>
           </a:p>
@@ -1384,18 +1385,12 @@
           <a:p>
             <a:fld id="{C1FF6DA9-008F-8B48-92A6-B652298478BF}" type="slidenum">
               <a:rPr lang="en-US" smtClean="0"/>
-              <a:t>‹#›</a:t>
             </a:fld>
             <a:endParaRPr lang="en-US"/>
           </a:p>
         </p:txBody>
       </p:sp>
     </p:spTree>
-    <p:extLst>
-      <p:ext uri="{BB962C8B-B14F-4D97-AF65-F5344CB8AC3E}">
-        <p14:creationId xmlns:p14="http://schemas.microsoft.com/office/powerpoint/2010/main" val="2782244947"/>
-      </p:ext>
-    </p:extLst>
   </p:cSld>
   <p:clrMapOvr>
     <a:masterClrMapping/>
@@ -1509,6 +1504,7 @@
               <a:rPr lang="en-US" smtClean="0"/>
               <a:t>Click to edit Master text styles</a:t>
             </a:r>
+            <a:endParaRPr lang="en-US" smtClean="0"/>
           </a:p>
         </p:txBody>
       </p:sp>
@@ -1565,6 +1561,7 @@
               <a:rPr lang="en-US" smtClean="0"/>
               <a:t>Click to edit Master text styles</a:t>
             </a:r>
+            <a:endParaRPr lang="en-US" smtClean="0"/>
           </a:p>
           <a:p>
             <a:pPr lvl="1"/>
@@ -1572,6 +1569,7 @@
               <a:rPr lang="en-US" smtClean="0"/>
               <a:t>Second level</a:t>
             </a:r>
+            <a:endParaRPr lang="en-US" smtClean="0"/>
           </a:p>
           <a:p>
             <a:pPr lvl="2"/>
@@ -1579,6 +1577,7 @@
               <a:rPr lang="en-US" smtClean="0"/>
               <a:t>Third level</a:t>
             </a:r>
+            <a:endParaRPr lang="en-US" smtClean="0"/>
           </a:p>
           <a:p>
             <a:pPr lvl="3"/>
@@ -1586,6 +1585,7 @@
               <a:rPr lang="en-US" smtClean="0"/>
               <a:t>Fourth level</a:t>
             </a:r>
+            <a:endParaRPr lang="en-US" smtClean="0"/>
           </a:p>
           <a:p>
             <a:pPr lvl="4"/>
@@ -1659,6 +1659,7 @@
               <a:rPr lang="en-US" smtClean="0"/>
               <a:t>Click to edit Master text styles</a:t>
             </a:r>
+            <a:endParaRPr lang="en-US" smtClean="0"/>
           </a:p>
         </p:txBody>
       </p:sp>
@@ -1715,6 +1716,7 @@
               <a:rPr lang="en-US" smtClean="0"/>
               <a:t>Click to edit Master text styles</a:t>
             </a:r>
+            <a:endParaRPr lang="en-US" smtClean="0"/>
           </a:p>
           <a:p>
             <a:pPr lvl="1"/>
@@ -1722,6 +1724,7 @@
               <a:rPr lang="en-US" smtClean="0"/>
               <a:t>Second level</a:t>
             </a:r>
+            <a:endParaRPr lang="en-US" smtClean="0"/>
           </a:p>
           <a:p>
             <a:pPr lvl="2"/>
@@ -1729,6 +1732,7 @@
               <a:rPr lang="en-US" smtClean="0"/>
               <a:t>Third level</a:t>
             </a:r>
+            <a:endParaRPr lang="en-US" smtClean="0"/>
           </a:p>
           <a:p>
             <a:pPr lvl="3"/>
@@ -1736,6 +1740,7 @@
               <a:rPr lang="en-US" smtClean="0"/>
               <a:t>Fourth level</a:t>
             </a:r>
+            <a:endParaRPr lang="en-US" smtClean="0"/>
           </a:p>
           <a:p>
             <a:pPr lvl="4"/>
@@ -1764,7 +1769,6 @@
           <a:p>
             <a:fld id="{5BCAD085-E8A6-8845-BD4E-CB4CCA059FC4}" type="datetimeFigureOut">
               <a:rPr lang="en-US" smtClean="0"/>
-              <a:t>1/27/13</a:t>
             </a:fld>
             <a:endParaRPr lang="en-US"/>
           </a:p>
@@ -1806,18 +1810,12 @@
           <a:p>
             <a:fld id="{C1FF6DA9-008F-8B48-92A6-B652298478BF}" type="slidenum">
               <a:rPr lang="en-US" smtClean="0"/>
-              <a:t>‹#›</a:t>
             </a:fld>
             <a:endParaRPr lang="en-US"/>
           </a:p>
         </p:txBody>
       </p:sp>
     </p:spTree>
-    <p:extLst>
-      <p:ext uri="{BB962C8B-B14F-4D97-AF65-F5344CB8AC3E}">
-        <p14:creationId xmlns:p14="http://schemas.microsoft.com/office/powerpoint/2010/main" val="990158736"/>
-      </p:ext>
-    </p:extLst>
   </p:cSld>
   <p:clrMapOvr>
     <a:masterClrMapping/>
@@ -1882,7 +1880,6 @@
           <a:p>
             <a:fld id="{5BCAD085-E8A6-8845-BD4E-CB4CCA059FC4}" type="datetimeFigureOut">
               <a:rPr lang="en-US" smtClean="0"/>
-              <a:t>1/27/13</a:t>
             </a:fld>
             <a:endParaRPr lang="en-US"/>
           </a:p>
@@ -1924,18 +1921,12 @@
           <a:p>
             <a:fld id="{C1FF6DA9-008F-8B48-92A6-B652298478BF}" type="slidenum">
               <a:rPr lang="en-US" smtClean="0"/>
-              <a:t>‹#›</a:t>
             </a:fld>
             <a:endParaRPr lang="en-US"/>
           </a:p>
         </p:txBody>
       </p:sp>
     </p:spTree>
-    <p:extLst>
-      <p:ext uri="{BB962C8B-B14F-4D97-AF65-F5344CB8AC3E}">
-        <p14:creationId xmlns:p14="http://schemas.microsoft.com/office/powerpoint/2010/main" val="727027711"/>
-      </p:ext>
-    </p:extLst>
   </p:cSld>
   <p:clrMapOvr>
     <a:masterClrMapping/>
@@ -1977,7 +1968,6 @@
           <a:p>
             <a:fld id="{5BCAD085-E8A6-8845-BD4E-CB4CCA059FC4}" type="datetimeFigureOut">
               <a:rPr lang="en-US" smtClean="0"/>
-              <a:t>1/27/13</a:t>
             </a:fld>
             <a:endParaRPr lang="en-US"/>
           </a:p>
@@ -2019,18 +2009,12 @@
           <a:p>
             <a:fld id="{C1FF6DA9-008F-8B48-92A6-B652298478BF}" type="slidenum">
               <a:rPr lang="en-US" smtClean="0"/>
-              <a:t>‹#›</a:t>
             </a:fld>
             <a:endParaRPr lang="en-US"/>
           </a:p>
         </p:txBody>
       </p:sp>
     </p:spTree>
-    <p:extLst>
-      <p:ext uri="{BB962C8B-B14F-4D97-AF65-F5344CB8AC3E}">
-        <p14:creationId xmlns:p14="http://schemas.microsoft.com/office/powerpoint/2010/main" val="1212999818"/>
-      </p:ext>
-    </p:extLst>
   </p:cSld>
   <p:clrMapOvr>
     <a:masterClrMapping/>
@@ -2140,6 +2124,7 @@
               <a:rPr lang="en-US" smtClean="0"/>
               <a:t>Click to edit Master text styles</a:t>
             </a:r>
+            <a:endParaRPr lang="en-US" smtClean="0"/>
           </a:p>
           <a:p>
             <a:pPr lvl="1"/>
@@ -2147,6 +2132,7 @@
               <a:rPr lang="en-US" smtClean="0"/>
               <a:t>Second level</a:t>
             </a:r>
+            <a:endParaRPr lang="en-US" smtClean="0"/>
           </a:p>
           <a:p>
             <a:pPr lvl="2"/>
@@ -2154,6 +2140,7 @@
               <a:rPr lang="en-US" smtClean="0"/>
               <a:t>Third level</a:t>
             </a:r>
+            <a:endParaRPr lang="en-US" smtClean="0"/>
           </a:p>
           <a:p>
             <a:pPr lvl="3"/>
@@ -2161,6 +2148,7 @@
               <a:rPr lang="en-US" smtClean="0"/>
               <a:t>Fourth level</a:t>
             </a:r>
+            <a:endParaRPr lang="en-US" smtClean="0"/>
           </a:p>
           <a:p>
             <a:pPr lvl="4"/>
@@ -2234,6 +2222,7 @@
               <a:rPr lang="en-US" smtClean="0"/>
               <a:t>Click to edit Master text styles</a:t>
             </a:r>
+            <a:endParaRPr lang="en-US" smtClean="0"/>
           </a:p>
         </p:txBody>
       </p:sp>
@@ -2254,7 +2243,6 @@
           <a:p>
             <a:fld id="{5BCAD085-E8A6-8845-BD4E-CB4CCA059FC4}" type="datetimeFigureOut">
               <a:rPr lang="en-US" smtClean="0"/>
-              <a:t>1/27/13</a:t>
             </a:fld>
             <a:endParaRPr lang="en-US"/>
           </a:p>
@@ -2296,18 +2284,12 @@
           <a:p>
             <a:fld id="{C1FF6DA9-008F-8B48-92A6-B652298478BF}" type="slidenum">
               <a:rPr lang="en-US" smtClean="0"/>
-              <a:t>‹#›</a:t>
             </a:fld>
             <a:endParaRPr lang="en-US"/>
           </a:p>
         </p:txBody>
       </p:sp>
     </p:spTree>
-    <p:extLst>
-      <p:ext uri="{BB962C8B-B14F-4D97-AF65-F5344CB8AC3E}">
-        <p14:creationId xmlns:p14="http://schemas.microsoft.com/office/powerpoint/2010/main" val="1840726560"/>
-      </p:ext>
-    </p:extLst>
   </p:cSld>
   <p:clrMapOvr>
     <a:masterClrMapping/>
@@ -2487,6 +2469,7 @@
               <a:rPr lang="en-US" smtClean="0"/>
               <a:t>Click to edit Master text styles</a:t>
             </a:r>
+            <a:endParaRPr lang="en-US" smtClean="0"/>
           </a:p>
         </p:txBody>
       </p:sp>
@@ -2507,7 +2490,6 @@
           <a:p>
             <a:fld id="{5BCAD085-E8A6-8845-BD4E-CB4CCA059FC4}" type="datetimeFigureOut">
               <a:rPr lang="en-US" smtClean="0"/>
-              <a:t>1/27/13</a:t>
             </a:fld>
             <a:endParaRPr lang="en-US"/>
           </a:p>
@@ -2549,18 +2531,12 @@
           <a:p>
             <a:fld id="{C1FF6DA9-008F-8B48-92A6-B652298478BF}" type="slidenum">
               <a:rPr lang="en-US" smtClean="0"/>
-              <a:t>‹#›</a:t>
             </a:fld>
             <a:endParaRPr lang="en-US"/>
           </a:p>
         </p:txBody>
       </p:sp>
     </p:spTree>
-    <p:extLst>
-      <p:ext uri="{BB962C8B-B14F-4D97-AF65-F5344CB8AC3E}">
-        <p14:creationId xmlns:p14="http://schemas.microsoft.com/office/powerpoint/2010/main" val="3889236939"/>
-      </p:ext>
-    </p:extLst>
   </p:cSld>
   <p:clrMapOvr>
     <a:masterClrMapping/>
@@ -2653,6 +2629,7 @@
               <a:rPr lang="en-US" smtClean="0"/>
               <a:t>Click to edit Master text styles</a:t>
             </a:r>
+            <a:endParaRPr lang="en-US" smtClean="0"/>
           </a:p>
           <a:p>
             <a:pPr lvl="1"/>
@@ -2660,6 +2637,7 @@
               <a:rPr lang="en-US" smtClean="0"/>
               <a:t>Second level</a:t>
             </a:r>
+            <a:endParaRPr lang="en-US" smtClean="0"/>
           </a:p>
           <a:p>
             <a:pPr lvl="2"/>
@@ -2667,6 +2645,7 @@
               <a:rPr lang="en-US" smtClean="0"/>
               <a:t>Third level</a:t>
             </a:r>
+            <a:endParaRPr lang="en-US" smtClean="0"/>
           </a:p>
           <a:p>
             <a:pPr lvl="3"/>
@@ -2674,6 +2653,7 @@
               <a:rPr lang="en-US" smtClean="0"/>
               <a:t>Fourth level</a:t>
             </a:r>
+            <a:endParaRPr lang="en-US" smtClean="0"/>
           </a:p>
           <a:p>
             <a:pPr lvl="4"/>
@@ -2720,7 +2700,6 @@
           <a:p>
             <a:fld id="{5BCAD085-E8A6-8845-BD4E-CB4CCA059FC4}" type="datetimeFigureOut">
               <a:rPr lang="en-US" smtClean="0"/>
-              <a:t>1/27/13</a:t>
             </a:fld>
             <a:endParaRPr lang="en-US"/>
           </a:p>
@@ -2798,18 +2777,12 @@
           <a:p>
             <a:fld id="{C1FF6DA9-008F-8B48-92A6-B652298478BF}" type="slidenum">
               <a:rPr lang="en-US" smtClean="0"/>
-              <a:t>‹#›</a:t>
             </a:fld>
             <a:endParaRPr lang="en-US"/>
           </a:p>
         </p:txBody>
       </p:sp>
     </p:spTree>
-    <p:extLst>
-      <p:ext uri="{BB962C8B-B14F-4D97-AF65-F5344CB8AC3E}">
-        <p14:creationId xmlns:p14="http://schemas.microsoft.com/office/powerpoint/2010/main" val="2209977519"/>
-      </p:ext>
-    </p:extLst>
   </p:cSld>
   <p:clrMap bg1="lt1" tx1="dk1" bg2="lt2" tx2="dk2" accent1="accent1" accent2="accent2" accent3="accent3" accent4="accent4" accent5="accent5" accent6="accent6" hlink="hlink" folHlink="folHlink"/>
   <p:sldLayoutIdLst>
@@ -2847,7 +2820,7 @@
         <a:spcBef>
           <a:spcPct val="20000"/>
         </a:spcBef>
-        <a:buFont typeface="Arial"/>
+        <a:buFont typeface="Arial" panose="020B0604020202020204"/>
         <a:buChar char="•"/>
         <a:defRPr sz="3200" kern="1200">
           <a:solidFill>
@@ -2862,7 +2835,7 @@
         <a:spcBef>
           <a:spcPct val="20000"/>
         </a:spcBef>
-        <a:buFont typeface="Arial"/>
+        <a:buFont typeface="Arial" panose="020B0604020202020204"/>
         <a:buChar char="–"/>
         <a:defRPr sz="2800" kern="1200">
           <a:solidFill>
@@ -2877,7 +2850,7 @@
         <a:spcBef>
           <a:spcPct val="20000"/>
         </a:spcBef>
-        <a:buFont typeface="Arial"/>
+        <a:buFont typeface="Arial" panose="020B0604020202020204"/>
         <a:buChar char="•"/>
         <a:defRPr sz="2400" kern="1200">
           <a:solidFill>
@@ -2892,7 +2865,7 @@
         <a:spcBef>
           <a:spcPct val="20000"/>
         </a:spcBef>
-        <a:buFont typeface="Arial"/>
+        <a:buFont typeface="Arial" panose="020B0604020202020204"/>
         <a:buChar char="–"/>
         <a:defRPr sz="2000" kern="1200">
           <a:solidFill>
@@ -2907,7 +2880,7 @@
         <a:spcBef>
           <a:spcPct val="20000"/>
         </a:spcBef>
-        <a:buFont typeface="Arial"/>
+        <a:buFont typeface="Arial" panose="020B0604020202020204"/>
         <a:buChar char="»"/>
         <a:defRPr sz="2000" kern="1200">
           <a:solidFill>
@@ -2922,7 +2895,7 @@
         <a:spcBef>
           <a:spcPct val="20000"/>
         </a:spcBef>
-        <a:buFont typeface="Arial"/>
+        <a:buFont typeface="Arial" panose="020B0604020202020204"/>
         <a:buChar char="•"/>
         <a:defRPr sz="2000" kern="1200">
           <a:solidFill>
@@ -2937,7 +2910,7 @@
         <a:spcBef>
           <a:spcPct val="20000"/>
         </a:spcBef>
-        <a:buFont typeface="Arial"/>
+        <a:buFont typeface="Arial" panose="020B0604020202020204"/>
         <a:buChar char="•"/>
         <a:defRPr sz="2000" kern="1200">
           <a:solidFill>
@@ -2952,7 +2925,7 @@
         <a:spcBef>
           <a:spcPct val="20000"/>
         </a:spcBef>
-        <a:buFont typeface="Arial"/>
+        <a:buFont typeface="Arial" panose="020B0604020202020204"/>
         <a:buChar char="•"/>
         <a:defRPr sz="2000" kern="1200">
           <a:solidFill>
@@ -2967,7 +2940,7 @@
         <a:spcBef>
           <a:spcPct val="20000"/>
         </a:spcBef>
-        <a:buFont typeface="Arial"/>
+        <a:buFont typeface="Arial" panose="020B0604020202020204"/>
         <a:buChar char="•"/>
         <a:defRPr sz="2000" kern="1200">
           <a:solidFill>
@@ -3079,7 +3052,7 @@
 </file>
 
 <file path=ppt/slides/slide1.xml><?xml version="1.0" encoding="utf-8"?>
-<p:sld xmlns:a="http://schemas.openxmlformats.org/drawingml/2006/main" xmlns:p="http://schemas.openxmlformats.org/presentationml/2006/main" xmlns:r="http://schemas.openxmlformats.org/officeDocument/2006/relationships">
+<p:sld xmlns:a="http://schemas.openxmlformats.org/drawingml/2006/main" xmlns:r="http://schemas.openxmlformats.org/officeDocument/2006/relationships" xmlns:p="http://schemas.openxmlformats.org/presentationml/2006/main">
   <p:cSld>
     <p:spTree>
       <p:nvGrpSpPr>
@@ -3193,7 +3166,7 @@
           <a:noFill/>
         </p:spPr>
         <p:txBody>
-          <a:bodyPr wrap="square" lIns="0" rIns="0" tIns="0" bIns="0" anchor="t"/>
+          <a:bodyPr wrap="square" lIns="0" tIns="0" rIns="0" bIns="0" anchor="t"/>
           <a:lstStyle/>
           <a:p>
             <a:pPr algn="l">
@@ -3215,6 +3188,14 @@
               </a:rPr>
               <a:t>139788 Step 3 — Dead-leg and hold-up retrofit</a:t>
             </a:r>
+            <a:endParaRPr sz="2000" b="1">
+              <a:solidFill>
+                <a:srgbClr val="1A2332"/>
+              </a:solidFill>
+              <a:latin typeface="DejaVu Sans"/>
+              <a:ea typeface="DejaVu Sans"/>
+              <a:cs typeface="DejaVu Sans"/>
+            </a:endParaRPr>
           </a:p>
         </p:txBody>
       </p:sp>
@@ -3235,7 +3216,7 @@
           <a:noFill/>
         </p:spPr>
         <p:txBody>
-          <a:bodyPr wrap="square" lIns="0" rIns="0" tIns="0" bIns="0" anchor="t"/>
+          <a:bodyPr wrap="square" lIns="0" tIns="0" rIns="0" bIns="0" anchor="t"/>
           <a:lstStyle/>
           <a:p>
             <a:pPr algn="l">
@@ -3257,48 +3238,14 @@
               </a:rPr>
               <a:t>Demo: Option 1    Pre-PPQ and PPQ: Option 2    Commercial: Option 3</a:t>
             </a:r>
-          </a:p>
-        </p:txBody>
-      </p:sp>
-      <p:sp>
-        <p:nvSpPr>
-          <p:cNvPr id="6" name="TextBox 5"/>
-          <p:cNvSpPr txBox="1"/>
-          <p:nvPr/>
-        </p:nvSpPr>
-        <p:spPr>
-          <a:xfrm>
-            <a:off x="8778240" y="475488"/>
-            <a:ext cx="3108960" cy="237744"/>
-          </a:xfrm>
-          <a:prstGeom prst="rect">
-            <a:avLst/>
-          </a:prstGeom>
-          <a:noFill/>
-        </p:spPr>
-        <p:txBody>
-          <a:bodyPr wrap="square" lIns="0" rIns="0" tIns="0" bIns="0" anchor="t"/>
-          <a:lstStyle/>
-          <a:p>
-            <a:pPr algn="r">
-              <a:spcBef>
-                <a:spcPts val="0"/>
-              </a:spcBef>
-              <a:spcAft>
-                <a:spcPts val="0"/>
-              </a:spcAft>
-            </a:pPr>
-            <a:r>
-              <a:rPr sz="1200" b="0">
-                <a:solidFill>
-                  <a:srgbClr val="5D6D7E"/>
-                </a:solidFill>
-                <a:latin typeface="DejaVu Sans"/>
-                <a:ea typeface="DejaVu Sans"/>
-                <a:cs typeface="DejaVu Sans"/>
-              </a:rPr>
-              <a:t>All four steps handle process material.</a:t>
-            </a:r>
+            <a:endParaRPr sz="1200" b="0">
+              <a:solidFill>
+                <a:srgbClr val="5D6D7E"/>
+              </a:solidFill>
+              <a:latin typeface="DejaVu Sans"/>
+              <a:ea typeface="DejaVu Sans"/>
+              <a:cs typeface="DejaVu Sans"/>
+            </a:endParaRPr>
           </a:p>
         </p:txBody>
       </p:sp>
@@ -3336,7 +3283,7 @@
                     <a:p>
                       <a:pPr algn="ctr"/>
                       <a:r>
-                        <a:rPr sz="1100" b="1">
+                        <a:rPr sz="1200" b="1">
                           <a:solidFill>
                             <a:srgbClr val="FFFFFF"/>
                           </a:solidFill>
@@ -3346,9 +3293,17 @@
                         </a:rPr>
                         <a:t>Option</a:t>
                       </a:r>
+                      <a:endParaRPr sz="1200" b="1">
+                        <a:solidFill>
+                          <a:srgbClr val="FFFFFF"/>
+                        </a:solidFill>
+                        <a:latin typeface="DejaVu Sans"/>
+                        <a:ea typeface="DejaVu Sans"/>
+                        <a:cs typeface="DejaVu Sans"/>
+                      </a:endParaRPr>
                     </a:p>
                   </a:txBody>
-                  <a:tcPr marL="91440" marR="73152" marT="54864" marB="54864" anchor="ctr">
+                  <a:tcPr marR="73152" marT="54864" marB="54864" anchor="ctr">
                     <a:solidFill>
                       <a:srgbClr val="1A2332"/>
                     </a:solidFill>
@@ -3361,7 +3316,7 @@
                     <a:p>
                       <a:pPr algn="l"/>
                       <a:r>
-                        <a:rPr sz="1100" b="1">
+                        <a:rPr sz="1200" b="1">
                           <a:solidFill>
                             <a:srgbClr val="FFFFFF"/>
                           </a:solidFill>
@@ -3371,9 +3326,17 @@
                         </a:rPr>
                         <a:t>What it covers</a:t>
                       </a:r>
+                      <a:endParaRPr sz="1200" b="1">
+                        <a:solidFill>
+                          <a:srgbClr val="FFFFFF"/>
+                        </a:solidFill>
+                        <a:latin typeface="DejaVu Sans"/>
+                        <a:ea typeface="DejaVu Sans"/>
+                        <a:cs typeface="DejaVu Sans"/>
+                      </a:endParaRPr>
                     </a:p>
                   </a:txBody>
-                  <a:tcPr marL="91440" marR="73152" marT="54864" marB="54864" anchor="ctr">
+                  <a:tcPr marR="73152" marT="54864" marB="54864" anchor="ctr">
                     <a:solidFill>
                       <a:srgbClr val="1A2332"/>
                     </a:solidFill>
@@ -3386,7 +3349,7 @@
                     <a:p>
                       <a:pPr algn="l"/>
                       <a:r>
-                        <a:rPr sz="1100" b="1">
+                        <a:rPr sz="1200" b="1">
                           <a:solidFill>
                             <a:srgbClr val="FFFFFF"/>
                           </a:solidFill>
@@ -3396,9 +3359,17 @@
                         </a:rPr>
                         <a:t>Potential risk</a:t>
                       </a:r>
+                      <a:endParaRPr sz="1200" b="1">
+                        <a:solidFill>
+                          <a:srgbClr val="FFFFFF"/>
+                        </a:solidFill>
+                        <a:latin typeface="DejaVu Sans"/>
+                        <a:ea typeface="DejaVu Sans"/>
+                        <a:cs typeface="DejaVu Sans"/>
+                      </a:endParaRPr>
                     </a:p>
                   </a:txBody>
-                  <a:tcPr marL="91440" marR="73152" marT="54864" marB="54864" anchor="ctr">
+                  <a:tcPr marR="73152" marT="54864" marB="54864" anchor="ctr">
                     <a:solidFill>
                       <a:srgbClr val="1A2332"/>
                     </a:solidFill>
@@ -3411,7 +3382,7 @@
                     <a:p>
                       <a:pPr algn="l"/>
                       <a:r>
-                        <a:rPr sz="1100" b="1">
+                        <a:rPr sz="1200" b="1">
                           <a:solidFill>
                             <a:srgbClr val="FFFFFF"/>
                           </a:solidFill>
@@ -3421,9 +3392,17 @@
                         </a:rPr>
                         <a:t>Mitigation</a:t>
                       </a:r>
+                      <a:endParaRPr sz="1200" b="1">
+                        <a:solidFill>
+                          <a:srgbClr val="FFFFFF"/>
+                        </a:solidFill>
+                        <a:latin typeface="DejaVu Sans"/>
+                        <a:ea typeface="DejaVu Sans"/>
+                        <a:cs typeface="DejaVu Sans"/>
+                      </a:endParaRPr>
                     </a:p>
                   </a:txBody>
-                  <a:tcPr marL="91440" marR="73152" marT="54864" marB="54864" anchor="ctr">
+                  <a:tcPr marR="73152" marT="54864" marB="54864" anchor="ctr">
                     <a:solidFill>
                       <a:srgbClr val="1A2332"/>
                     </a:solidFill>
@@ -3436,7 +3415,7 @@
                     <a:p>
                       <a:pPr algn="ctr"/>
                       <a:r>
-                        <a:rPr sz="1100" b="1">
+                        <a:rPr sz="1200" b="1">
                           <a:solidFill>
                             <a:srgbClr val="FFFFFF"/>
                           </a:solidFill>
@@ -3446,9 +3425,17 @@
                         </a:rPr>
                         <a:t>After mitigation</a:t>
                       </a:r>
+                      <a:endParaRPr sz="1200" b="1">
+                        <a:solidFill>
+                          <a:srgbClr val="FFFFFF"/>
+                        </a:solidFill>
+                        <a:latin typeface="DejaVu Sans"/>
+                        <a:ea typeface="DejaVu Sans"/>
+                        <a:cs typeface="DejaVu Sans"/>
+                      </a:endParaRPr>
                     </a:p>
                   </a:txBody>
-                  <a:tcPr marL="91440" marR="73152" marT="54864" marB="54864" anchor="ctr">
+                  <a:tcPr marR="73152" marT="54864" marB="54864" anchor="ctr">
                     <a:solidFill>
                       <a:srgbClr val="1A2332"/>
                     </a:solidFill>
@@ -3461,7 +3448,7 @@
                     <a:p>
                       <a:pPr algn="ctr"/>
                       <a:r>
-                        <a:rPr sz="1100" b="1">
+                        <a:rPr sz="1200" b="1">
                           <a:solidFill>
                             <a:srgbClr val="FFFFFF"/>
                           </a:solidFill>
@@ -3471,9 +3458,17 @@
                         </a:rPr>
                         <a:t>Due</a:t>
                       </a:r>
+                      <a:endParaRPr sz="1200" b="1">
+                        <a:solidFill>
+                          <a:srgbClr val="FFFFFF"/>
+                        </a:solidFill>
+                        <a:latin typeface="DejaVu Sans"/>
+                        <a:ea typeface="DejaVu Sans"/>
+                        <a:cs typeface="DejaVu Sans"/>
+                      </a:endParaRPr>
                     </a:p>
                   </a:txBody>
-                  <a:tcPr marL="91440" marR="73152" marT="54864" marB="54864" anchor="ctr">
+                  <a:tcPr marR="73152" marT="54864" marB="54864" anchor="ctr">
                     <a:solidFill>
                       <a:srgbClr val="1A2332"/>
                     </a:solidFill>
@@ -3498,9 +3493,17 @@
                         </a:rPr>
                         <a:t>1</a:t>
                       </a:r>
+                      <a:endParaRPr sz="1600" b="1">
+                        <a:solidFill>
+                          <a:srgbClr val="FFFFFF"/>
+                        </a:solidFill>
+                        <a:latin typeface="DejaVu Sans"/>
+                        <a:ea typeface="DejaVu Sans"/>
+                        <a:cs typeface="DejaVu Sans"/>
+                      </a:endParaRPr>
                     </a:p>
                   </a:txBody>
-                  <a:tcPr marL="91440" marR="73152" marT="54864" marB="54864" anchor="ctr">
+                  <a:tcPr marR="73152" marT="54864" marB="54864" anchor="ctr">
                     <a:solidFill>
                       <a:srgbClr val="2D8B8B"/>
                     </a:solidFill>
@@ -3513,19 +3516,27 @@
                     <a:p>
                       <a:pPr algn="l"/>
                       <a:r>
-                        <a:rPr sz="1100" b="0">
+                        <a:rPr sz="1300" b="0">
                           <a:solidFill>
                             <a:srgbClr val="1C2833"/>
                           </a:solidFill>
-                          <a:latin typeface="DejaVu Sans"/>
+                          <a:latin typeface="Calibri" panose="020F0502020204030204" charset="0"/>
                           <a:ea typeface="DejaVu Sans"/>
-                          <a:cs typeface="DejaVu Sans"/>
+                          <a:cs typeface="Calibri" panose="020F0502020204030204" charset="0"/>
                         </a:rPr>
                         <a:t>Dead legs outside the 2D/3D criterion, diaphragm valves that are not self-draining, and non-BPE piping stay in place.</a:t>
                       </a:r>
+                      <a:endParaRPr sz="1300" b="0">
+                        <a:solidFill>
+                          <a:srgbClr val="1C2833"/>
+                        </a:solidFill>
+                        <a:latin typeface="Calibri" panose="020F0502020204030204" charset="0"/>
+                        <a:ea typeface="DejaVu Sans"/>
+                        <a:cs typeface="Calibri" panose="020F0502020204030204" charset="0"/>
+                      </a:endParaRPr>
                     </a:p>
                   </a:txBody>
-                  <a:tcPr marL="91440" marR="73152" marT="54864" marB="54864" anchor="ctr">
+                  <a:tcPr marR="73152" marT="54864" marB="54864" anchor="ctr">
                     <a:solidFill>
                       <a:srgbClr val="FFFFFF"/>
                     </a:solidFill>
@@ -3538,19 +3549,27 @@
                     <a:p>
                       <a:pPr algn="l"/>
                       <a:r>
-                        <a:rPr sz="1100" b="0">
+                        <a:rPr sz="1300" b="0">
                           <a:solidFill>
                             <a:srgbClr val="1C2833"/>
                           </a:solidFill>
-                          <a:latin typeface="DejaVu Sans"/>
+                          <a:latin typeface="Calibri" panose="020F0502020204030204" charset="0"/>
                           <a:ea typeface="DejaVu Sans"/>
-                          <a:cs typeface="DejaVu Sans"/>
+                          <a:cs typeface="Calibri" panose="020F0502020204030204" charset="0"/>
                         </a:rPr>
                         <a:t>Hold-up can degrade material, support microbial growth, or cause cross-contamination. Flush, drain, purge, and disassembly after each use are not defined.</a:t>
                       </a:r>
+                      <a:endParaRPr sz="1300" b="0">
+                        <a:solidFill>
+                          <a:srgbClr val="1C2833"/>
+                        </a:solidFill>
+                        <a:latin typeface="Calibri" panose="020F0502020204030204" charset="0"/>
+                        <a:ea typeface="DejaVu Sans"/>
+                        <a:cs typeface="Calibri" panose="020F0502020204030204" charset="0"/>
+                      </a:endParaRPr>
                     </a:p>
                   </a:txBody>
-                  <a:tcPr marL="91440" marR="73152" marT="54864" marB="54864" anchor="ctr">
+                  <a:tcPr marR="73152" marT="54864" marB="54864" anchor="ctr">
                     <a:solidFill>
                       <a:srgbClr val="FFFFFF"/>
                     </a:solidFill>
@@ -3563,19 +3582,27 @@
                     <a:p>
                       <a:pPr algn="l"/>
                       <a:r>
-                        <a:rPr sz="1100" b="0">
+                        <a:rPr sz="1300" b="0">
                           <a:solidFill>
                             <a:srgbClr val="1C2833"/>
                           </a:solidFill>
-                          <a:latin typeface="DejaVu Sans"/>
+                          <a:latin typeface="Calibri" panose="020F0502020204030204" charset="0"/>
                           <a:ea typeface="DejaVu Sans"/>
-                          <a:cs typeface="DejaVu Sans"/>
+                          <a:cs typeface="Calibri" panose="020F0502020204030204" charset="0"/>
                         </a:rPr>
                         <a:t>After each system transfer, flush or clean with process solvent, supported by bioburden data. Define those steps in the procedures.</a:t>
                       </a:r>
+                      <a:endParaRPr sz="1300" b="0">
+                        <a:solidFill>
+                          <a:srgbClr val="1C2833"/>
+                        </a:solidFill>
+                        <a:latin typeface="Calibri" panose="020F0502020204030204" charset="0"/>
+                        <a:ea typeface="DejaVu Sans"/>
+                        <a:cs typeface="Calibri" panose="020F0502020204030204" charset="0"/>
+                      </a:endParaRPr>
                     </a:p>
                   </a:txBody>
-                  <a:tcPr marL="91440" marR="73152" marT="54864" marB="54864" anchor="ctr">
+                  <a:tcPr marR="73152" marT="54864" marB="54864" anchor="ctr">
                     <a:solidFill>
                       <a:srgbClr val="FFFFFF"/>
                     </a:solidFill>
@@ -3588,19 +3615,27 @@
                     <a:p>
                       <a:pPr algn="ctr"/>
                       <a:r>
-                        <a:rPr sz="1200" b="1">
+                        <a:rPr sz="1300" b="1">
                           <a:solidFill>
                             <a:srgbClr val="1F6B4A"/>
                           </a:solidFill>
-                          <a:latin typeface="DejaVu Sans"/>
+                          <a:latin typeface="Calibri" panose="020F0502020204030204" charset="0"/>
                           <a:ea typeface="DejaVu Sans"/>
-                          <a:cs typeface="DejaVu Sans"/>
+                          <a:cs typeface="Calibri" panose="020F0502020204030204" charset="0"/>
                         </a:rPr>
                         <a:t>Low</a:t>
                       </a:r>
+                      <a:endParaRPr sz="1300" b="1">
+                        <a:solidFill>
+                          <a:srgbClr val="1F6B4A"/>
+                        </a:solidFill>
+                        <a:latin typeface="Calibri" panose="020F0502020204030204" charset="0"/>
+                        <a:ea typeface="DejaVu Sans"/>
+                        <a:cs typeface="Calibri" panose="020F0502020204030204" charset="0"/>
+                      </a:endParaRPr>
                     </a:p>
                   </a:txBody>
-                  <a:tcPr marL="91440" marR="73152" marT="54864" marB="54864" anchor="ctr">
+                  <a:tcPr marR="73152" marT="54864" marB="54864" anchor="ctr">
                     <a:solidFill>
                       <a:srgbClr val="E8F2EA"/>
                     </a:solidFill>
@@ -3613,19 +3648,27 @@
                     <a:p>
                       <a:pPr algn="ctr"/>
                       <a:r>
-                        <a:rPr sz="1100" b="0">
+                        <a:rPr sz="1300" b="0">
                           <a:solidFill>
                             <a:srgbClr val="1C2833"/>
                           </a:solidFill>
-                          <a:latin typeface="DejaVu Sans"/>
+                          <a:latin typeface="Calibri" panose="020F0502020204030204" charset="0"/>
                           <a:ea typeface="DejaVu Sans"/>
-                          <a:cs typeface="DejaVu Sans"/>
+                          <a:cs typeface="Calibri" panose="020F0502020204030204" charset="0"/>
                         </a:rPr>
                         <a:t>Nov 5, 2026</a:t>
                       </a:r>
+                      <a:endParaRPr sz="1300" b="0">
+                        <a:solidFill>
+                          <a:srgbClr val="1C2833"/>
+                        </a:solidFill>
+                        <a:latin typeface="Calibri" panose="020F0502020204030204" charset="0"/>
+                        <a:ea typeface="DejaVu Sans"/>
+                        <a:cs typeface="Calibri" panose="020F0502020204030204" charset="0"/>
+                      </a:endParaRPr>
                     </a:p>
                   </a:txBody>
-                  <a:tcPr marL="91440" marR="73152" marT="54864" marB="54864" anchor="ctr">
+                  <a:tcPr marR="73152" marT="54864" marB="54864" anchor="ctr">
                     <a:solidFill>
                       <a:srgbClr val="FFFFFF"/>
                     </a:solidFill>
@@ -3650,9 +3693,17 @@
                         </a:rPr>
                         <a:t>2</a:t>
                       </a:r>
+                      <a:endParaRPr sz="1600" b="1">
+                        <a:solidFill>
+                          <a:srgbClr val="FFFFFF"/>
+                        </a:solidFill>
+                        <a:latin typeface="DejaVu Sans"/>
+                        <a:ea typeface="DejaVu Sans"/>
+                        <a:cs typeface="DejaVu Sans"/>
+                      </a:endParaRPr>
                     </a:p>
                   </a:txBody>
-                  <a:tcPr marL="91440" marR="73152" marT="54864" marB="54864" anchor="ctr">
+                  <a:tcPr marR="73152" marT="54864" marB="54864" anchor="ctr">
                     <a:solidFill>
                       <a:srgbClr val="2D8B8B"/>
                     </a:solidFill>
@@ -3665,19 +3716,27 @@
                     <a:p>
                       <a:pPr algn="l"/>
                       <a:r>
-                        <a:rPr sz="1100" b="0">
+                        <a:rPr sz="1300" b="0">
                           <a:solidFill>
                             <a:srgbClr val="1C2833"/>
                           </a:solidFill>
-                          <a:latin typeface="DejaVu Sans"/>
+                          <a:latin typeface="Calibri" panose="020F0502020204030204" charset="0"/>
                           <a:ea typeface="DejaVu Sans"/>
-                          <a:cs typeface="DejaVu Sans"/>
+                          <a:cs typeface="Calibri" panose="020F0502020204030204" charset="0"/>
                         </a:rPr>
                         <a:t>Rebuild piping and vessels with hygienic T-valves and 3D short-outlet tees. Control dead legs, slope, and drainability. Reserve CIP tie-in valves.</a:t>
                       </a:r>
+                      <a:endParaRPr sz="1300" b="0">
+                        <a:solidFill>
+                          <a:srgbClr val="1C2833"/>
+                        </a:solidFill>
+                        <a:latin typeface="Calibri" panose="020F0502020204030204" charset="0"/>
+                        <a:ea typeface="DejaVu Sans"/>
+                        <a:cs typeface="Calibri" panose="020F0502020204030204" charset="0"/>
+                      </a:endParaRPr>
                     </a:p>
                   </a:txBody>
-                  <a:tcPr marL="91440" marR="73152" marT="54864" marB="54864" anchor="ctr">
+                  <a:tcPr marR="73152" marT="54864" marB="54864" anchor="ctr">
                     <a:solidFill>
                       <a:srgbClr val="F7FBFB"/>
                     </a:solidFill>
@@ -3690,19 +3749,27 @@
                     <a:p>
                       <a:pPr algn="l"/>
                       <a:r>
-                        <a:rPr sz="1100" b="0">
+                        <a:rPr sz="1300" b="0">
                           <a:solidFill>
                             <a:srgbClr val="1C2833"/>
                           </a:solidFill>
-                          <a:latin typeface="DejaVu Sans"/>
+                          <a:latin typeface="Calibri" panose="020F0502020204030204" charset="0"/>
                           <a:ea typeface="DejaVu Sans"/>
-                          <a:cs typeface="DejaVu Sans"/>
+                          <a:cs typeface="Calibri" panose="020F0502020204030204" charset="0"/>
                         </a:rPr>
                         <a:t>New change control, with a concern for product quality. Pre-use and post-use steps may still be insufficient.</a:t>
                       </a:r>
+                      <a:endParaRPr sz="1300" b="0">
+                        <a:solidFill>
+                          <a:srgbClr val="1C2833"/>
+                        </a:solidFill>
+                        <a:latin typeface="Calibri" panose="020F0502020204030204" charset="0"/>
+                        <a:ea typeface="DejaVu Sans"/>
+                        <a:cs typeface="Calibri" panose="020F0502020204030204" charset="0"/>
+                      </a:endParaRPr>
                     </a:p>
                   </a:txBody>
-                  <a:tcPr marL="91440" marR="73152" marT="54864" marB="54864" anchor="ctr">
+                  <a:tcPr marR="73152" marT="54864" marB="54864" anchor="ctr">
                     <a:solidFill>
                       <a:srgbClr val="F7FBFB"/>
                     </a:solidFill>
@@ -3715,19 +3782,27 @@
                     <a:p>
                       <a:pPr algn="l"/>
                       <a:r>
-                        <a:rPr sz="1100" b="0">
+                        <a:rPr sz="1300" b="0">
                           <a:solidFill>
                             <a:srgbClr val="1C2833"/>
                           </a:solidFill>
-                          <a:latin typeface="DejaVu Sans"/>
+                          <a:latin typeface="Calibri" panose="020F0502020204030204" charset="0"/>
                           <a:ea typeface="DejaVu Sans"/>
-                          <a:cs typeface="DejaVu Sans"/>
+                          <a:cs typeface="Calibri" panose="020F0502020204030204" charset="0"/>
                         </a:rPr>
                         <a:t>Qualify the modified piping. Define the operating and cleaning sequence and update the records.</a:t>
                       </a:r>
+                      <a:endParaRPr sz="1300" b="0">
+                        <a:solidFill>
+                          <a:srgbClr val="1C2833"/>
+                        </a:solidFill>
+                        <a:latin typeface="Calibri" panose="020F0502020204030204" charset="0"/>
+                        <a:ea typeface="DejaVu Sans"/>
+                        <a:cs typeface="Calibri" panose="020F0502020204030204" charset="0"/>
+                      </a:endParaRPr>
                     </a:p>
                   </a:txBody>
-                  <a:tcPr marL="91440" marR="73152" marT="54864" marB="54864" anchor="ctr">
+                  <a:tcPr marR="73152" marT="54864" marB="54864" anchor="ctr">
                     <a:solidFill>
                       <a:srgbClr val="F7FBFB"/>
                     </a:solidFill>
@@ -3740,19 +3815,27 @@
                     <a:p>
                       <a:pPr algn="ctr"/>
                       <a:r>
-                        <a:rPr sz="1200" b="1">
+                        <a:rPr sz="1300" b="1">
                           <a:solidFill>
                             <a:srgbClr val="1F6B4A"/>
                           </a:solidFill>
-                          <a:latin typeface="DejaVu Sans"/>
+                          <a:latin typeface="Calibri" panose="020F0502020204030204" charset="0"/>
                           <a:ea typeface="DejaVu Sans"/>
-                          <a:cs typeface="DejaVu Sans"/>
+                          <a:cs typeface="Calibri" panose="020F0502020204030204" charset="0"/>
                         </a:rPr>
                         <a:t>Low</a:t>
                       </a:r>
+                      <a:endParaRPr sz="1300" b="1">
+                        <a:solidFill>
+                          <a:srgbClr val="1F6B4A"/>
+                        </a:solidFill>
+                        <a:latin typeface="Calibri" panose="020F0502020204030204" charset="0"/>
+                        <a:ea typeface="DejaVu Sans"/>
+                        <a:cs typeface="Calibri" panose="020F0502020204030204" charset="0"/>
+                      </a:endParaRPr>
                     </a:p>
                   </a:txBody>
-                  <a:tcPr marL="91440" marR="73152" marT="54864" marB="54864" anchor="ctr">
+                  <a:tcPr marR="73152" marT="54864" marB="54864" anchor="ctr">
                     <a:solidFill>
                       <a:srgbClr val="E8F2EA"/>
                     </a:solidFill>
@@ -3765,19 +3848,27 @@
                     <a:p>
                       <a:pPr algn="ctr"/>
                       <a:r>
-                        <a:rPr sz="1100" b="0">
+                        <a:rPr sz="1300" b="0">
                           <a:solidFill>
                             <a:srgbClr val="1C2833"/>
                           </a:solidFill>
-                          <a:latin typeface="DejaVu Sans"/>
+                          <a:latin typeface="Calibri" panose="020F0502020204030204" charset="0"/>
                           <a:ea typeface="DejaVu Sans"/>
-                          <a:cs typeface="DejaVu Sans"/>
+                          <a:cs typeface="Calibri" panose="020F0502020204030204" charset="0"/>
                         </a:rPr>
                         <a:t>Feb 6, 2027</a:t>
                       </a:r>
+                      <a:endParaRPr sz="1300" b="0">
+                        <a:solidFill>
+                          <a:srgbClr val="1C2833"/>
+                        </a:solidFill>
+                        <a:latin typeface="Calibri" panose="020F0502020204030204" charset="0"/>
+                        <a:ea typeface="DejaVu Sans"/>
+                        <a:cs typeface="Calibri" panose="020F0502020204030204" charset="0"/>
+                      </a:endParaRPr>
                     </a:p>
                   </a:txBody>
-                  <a:tcPr marL="91440" marR="73152" marT="54864" marB="54864" anchor="ctr">
+                  <a:tcPr marR="73152" marT="54864" marB="54864" anchor="ctr">
                     <a:solidFill>
                       <a:srgbClr val="F7FBFB"/>
                     </a:solidFill>
@@ -3802,9 +3893,17 @@
                         </a:rPr>
                         <a:t>3</a:t>
                       </a:r>
+                      <a:endParaRPr sz="1600" b="1">
+                        <a:solidFill>
+                          <a:srgbClr val="FFFFFF"/>
+                        </a:solidFill>
+                        <a:latin typeface="DejaVu Sans"/>
+                        <a:ea typeface="DejaVu Sans"/>
+                        <a:cs typeface="DejaVu Sans"/>
+                      </a:endParaRPr>
                     </a:p>
                   </a:txBody>
-                  <a:tcPr marL="91440" marR="73152" marT="54864" marB="54864" anchor="ctr">
+                  <a:tcPr marR="73152" marT="54864" marB="54864" anchor="ctr">
                     <a:solidFill>
                       <a:srgbClr val="2D8B8B"/>
                     </a:solidFill>
@@ -3817,19 +3916,27 @@
                     <a:p>
                       <a:pPr algn="l"/>
                       <a:r>
-                        <a:rPr sz="1100" b="0">
+                        <a:rPr sz="1300" b="0">
                           <a:solidFill>
                             <a:srgbClr val="1C2833"/>
                           </a:solidFill>
-                          <a:latin typeface="DejaVu Sans"/>
+                          <a:latin typeface="Calibri" panose="020F0502020204030204" charset="0"/>
                           <a:ea typeface="DejaVu Sans"/>
-                          <a:cs typeface="DejaVu Sans"/>
+                          <a:cs typeface="Calibri" panose="020F0502020204030204" charset="0"/>
                         </a:rPr>
                         <a:t>Add clean-in-place on the Option 2 piping, including slope, drainage, dead-leg removal, and pre-use flush, cleaning, disinfection, and purge.</a:t>
                       </a:r>
+                      <a:endParaRPr sz="1300" b="0">
+                        <a:solidFill>
+                          <a:srgbClr val="1C2833"/>
+                        </a:solidFill>
+                        <a:latin typeface="Calibri" panose="020F0502020204030204" charset="0"/>
+                        <a:ea typeface="DejaVu Sans"/>
+                        <a:cs typeface="Calibri" panose="020F0502020204030204" charset="0"/>
+                      </a:endParaRPr>
                     </a:p>
                   </a:txBody>
-                  <a:tcPr marL="91440" marR="73152" marT="54864" marB="54864" anchor="ctr">
+                  <a:tcPr marR="73152" marT="54864" marB="54864" anchor="ctr">
                     <a:solidFill>
                       <a:srgbClr val="FFFFFF"/>
                     </a:solidFill>
@@ -3842,19 +3949,27 @@
                     <a:p>
                       <a:pPr algn="l"/>
                       <a:r>
-                        <a:rPr sz="1100" b="0">
+                        <a:rPr sz="1300" b="0">
                           <a:solidFill>
                             <a:srgbClr val="1C2833"/>
                           </a:solidFill>
-                          <a:latin typeface="DejaVu Sans"/>
+                          <a:latin typeface="Calibri" panose="020F0502020204030204" charset="0"/>
                           <a:ea typeface="DejaVu Sans"/>
-                          <a:cs typeface="DejaVu Sans"/>
+                          <a:cs typeface="Calibri" panose="020F0502020204030204" charset="0"/>
                         </a:rPr>
                         <a:t>The design may be incomplete, and the CIP sequence and controls may be incomplete.</a:t>
                       </a:r>
+                      <a:endParaRPr sz="1300" b="0">
+                        <a:solidFill>
+                          <a:srgbClr val="1C2833"/>
+                        </a:solidFill>
+                        <a:latin typeface="Calibri" panose="020F0502020204030204" charset="0"/>
+                        <a:ea typeface="DejaVu Sans"/>
+                        <a:cs typeface="Calibri" panose="020F0502020204030204" charset="0"/>
+                      </a:endParaRPr>
                     </a:p>
                   </a:txBody>
-                  <a:tcPr marL="91440" marR="73152" marT="54864" marB="54864" anchor="ctr">
+                  <a:tcPr marR="73152" marT="54864" marB="54864" anchor="ctr">
                     <a:solidFill>
                       <a:srgbClr val="FFFFFF"/>
                     </a:solidFill>
@@ -3867,19 +3982,27 @@
                     <a:p>
                       <a:pPr algn="l"/>
                       <a:r>
-                        <a:rPr sz="1100" b="0">
+                        <a:rPr sz="1300" b="0">
                           <a:solidFill>
                             <a:srgbClr val="1C2833"/>
                           </a:solidFill>
-                          <a:latin typeface="DejaVu Sans"/>
+                          <a:latin typeface="Calibri" panose="020F0502020204030204" charset="0"/>
                           <a:ea typeface="DejaVu Sans"/>
-                          <a:cs typeface="DejaVu Sans"/>
+                          <a:cs typeface="Calibri" panose="020F0502020204030204" charset="0"/>
                         </a:rPr>
                         <a:t>Qualify the system as a whole. Update the SOP and bring the requirements into routine use.</a:t>
                       </a:r>
+                      <a:endParaRPr sz="1300" b="0">
+                        <a:solidFill>
+                          <a:srgbClr val="1C2833"/>
+                        </a:solidFill>
+                        <a:latin typeface="Calibri" panose="020F0502020204030204" charset="0"/>
+                        <a:ea typeface="DejaVu Sans"/>
+                        <a:cs typeface="Calibri" panose="020F0502020204030204" charset="0"/>
+                      </a:endParaRPr>
                     </a:p>
                   </a:txBody>
-                  <a:tcPr marL="91440" marR="73152" marT="54864" marB="54864" anchor="ctr">
+                  <a:tcPr marR="73152" marT="54864" marB="54864" anchor="ctr">
                     <a:solidFill>
                       <a:srgbClr val="FFFFFF"/>
                     </a:solidFill>
@@ -3892,19 +4015,27 @@
                     <a:p>
                       <a:pPr algn="ctr"/>
                       <a:r>
-                        <a:rPr sz="1200" b="1">
+                        <a:rPr sz="1300" b="1">
                           <a:solidFill>
                             <a:srgbClr val="1F6B4A"/>
                           </a:solidFill>
-                          <a:latin typeface="DejaVu Sans"/>
+                          <a:latin typeface="Calibri" panose="020F0502020204030204" charset="0"/>
                           <a:ea typeface="DejaVu Sans"/>
-                          <a:cs typeface="DejaVu Sans"/>
+                          <a:cs typeface="Calibri" panose="020F0502020204030204" charset="0"/>
                         </a:rPr>
                         <a:t>Low</a:t>
                       </a:r>
+                      <a:endParaRPr sz="1300" b="1">
+                        <a:solidFill>
+                          <a:srgbClr val="1F6B4A"/>
+                        </a:solidFill>
+                        <a:latin typeface="Calibri" panose="020F0502020204030204" charset="0"/>
+                        <a:ea typeface="DejaVu Sans"/>
+                        <a:cs typeface="Calibri" panose="020F0502020204030204" charset="0"/>
+                      </a:endParaRPr>
                     </a:p>
                   </a:txBody>
-                  <a:tcPr marL="91440" marR="73152" marT="54864" marB="54864" anchor="ctr">
+                  <a:tcPr marR="73152" marT="54864" marB="54864" anchor="ctr">
                     <a:solidFill>
                       <a:srgbClr val="E8F2EA"/>
                     </a:solidFill>
@@ -3917,19 +4048,27 @@
                     <a:p>
                       <a:pPr algn="ctr"/>
                       <a:r>
-                        <a:rPr sz="1100" b="0">
+                        <a:rPr sz="1300" b="0">
                           <a:solidFill>
                             <a:srgbClr val="1C2833"/>
                           </a:solidFill>
-                          <a:latin typeface="DejaVu Sans"/>
+                          <a:latin typeface="Calibri" panose="020F0502020204030204" charset="0"/>
                           <a:ea typeface="DejaVu Sans"/>
-                          <a:cs typeface="DejaVu Sans"/>
+                          <a:cs typeface="Calibri" panose="020F0502020204030204" charset="0"/>
                         </a:rPr>
                         <a:t>5 months after Option 2</a:t>
                       </a:r>
+                      <a:endParaRPr sz="1300" b="0">
+                        <a:solidFill>
+                          <a:srgbClr val="1C2833"/>
+                        </a:solidFill>
+                        <a:latin typeface="Calibri" panose="020F0502020204030204" charset="0"/>
+                        <a:ea typeface="DejaVu Sans"/>
+                        <a:cs typeface="Calibri" panose="020F0502020204030204" charset="0"/>
+                      </a:endParaRPr>
                     </a:p>
                   </a:txBody>
-                  <a:tcPr marL="91440" marR="73152" marT="54864" marB="54864" anchor="ctr">
+                  <a:tcPr marR="73152" marT="54864" marB="54864" anchor="ctr">
                     <a:solidFill>
                       <a:srgbClr val="FFFFFF"/>
                     </a:solidFill>
@@ -3973,7 +4112,7 @@
                     <a:p>
                       <a:pPr algn="l"/>
                       <a:r>
-                        <a:rPr sz="1100" b="1">
+                        <a:rPr sz="1200" b="1">
                           <a:solidFill>
                             <a:srgbClr val="FFFFFF"/>
                           </a:solidFill>
@@ -3983,9 +4122,17 @@
                         </a:rPr>
                         <a:t>Process step</a:t>
                       </a:r>
+                      <a:endParaRPr sz="1200" b="1">
+                        <a:solidFill>
+                          <a:srgbClr val="FFFFFF"/>
+                        </a:solidFill>
+                        <a:latin typeface="DejaVu Sans"/>
+                        <a:ea typeface="DejaVu Sans"/>
+                        <a:cs typeface="DejaVu Sans"/>
+                      </a:endParaRPr>
                     </a:p>
                   </a:txBody>
-                  <a:tcPr marL="91440" marR="73152" marT="54864" marB="54864" anchor="ctr">
+                  <a:tcPr marR="73152" marT="54864" marB="54864" anchor="ctr">
                     <a:solidFill>
                       <a:srgbClr val="1A2332"/>
                     </a:solidFill>
@@ -3998,7 +4145,7 @@
                     <a:p>
                       <a:pPr algn="ctr"/>
                       <a:r>
-                        <a:rPr sz="1100" b="1">
+                        <a:rPr sz="1200" b="1">
                           <a:solidFill>
                             <a:srgbClr val="FFFFFF"/>
                           </a:solidFill>
@@ -4008,9 +4155,17 @@
                         </a:rPr>
                         <a:t>Demo</a:t>
                       </a:r>
+                      <a:endParaRPr sz="1200" b="1">
+                        <a:solidFill>
+                          <a:srgbClr val="FFFFFF"/>
+                        </a:solidFill>
+                        <a:latin typeface="DejaVu Sans"/>
+                        <a:ea typeface="DejaVu Sans"/>
+                        <a:cs typeface="DejaVu Sans"/>
+                      </a:endParaRPr>
                     </a:p>
                   </a:txBody>
-                  <a:tcPr marL="91440" marR="73152" marT="54864" marB="54864" anchor="ctr">
+                  <a:tcPr marR="73152" marT="54864" marB="54864" anchor="ctr">
                     <a:solidFill>
                       <a:srgbClr val="1A2332"/>
                     </a:solidFill>
@@ -4023,7 +4178,7 @@
                     <a:p>
                       <a:pPr algn="ctr"/>
                       <a:r>
-                        <a:rPr sz="1100" b="1">
+                        <a:rPr sz="1200" b="1">
                           <a:solidFill>
                             <a:srgbClr val="FFFFFF"/>
                           </a:solidFill>
@@ -4033,9 +4188,17 @@
                         </a:rPr>
                         <a:t>Pre-PPQ</a:t>
                       </a:r>
+                      <a:endParaRPr sz="1200" b="1">
+                        <a:solidFill>
+                          <a:srgbClr val="FFFFFF"/>
+                        </a:solidFill>
+                        <a:latin typeface="DejaVu Sans"/>
+                        <a:ea typeface="DejaVu Sans"/>
+                        <a:cs typeface="DejaVu Sans"/>
+                      </a:endParaRPr>
                     </a:p>
                   </a:txBody>
-                  <a:tcPr marL="91440" marR="73152" marT="54864" marB="54864" anchor="ctr">
+                  <a:tcPr marR="73152" marT="54864" marB="54864" anchor="ctr">
                     <a:solidFill>
                       <a:srgbClr val="1A2332"/>
                     </a:solidFill>
@@ -4048,7 +4211,7 @@
                     <a:p>
                       <a:pPr algn="ctr"/>
                       <a:r>
-                        <a:rPr sz="1100" b="1">
+                        <a:rPr sz="1200" b="1">
                           <a:solidFill>
                             <a:srgbClr val="FFFFFF"/>
                           </a:solidFill>
@@ -4058,9 +4221,17 @@
                         </a:rPr>
                         <a:t>PPQ</a:t>
                       </a:r>
+                      <a:endParaRPr sz="1200" b="1">
+                        <a:solidFill>
+                          <a:srgbClr val="FFFFFF"/>
+                        </a:solidFill>
+                        <a:latin typeface="DejaVu Sans"/>
+                        <a:ea typeface="DejaVu Sans"/>
+                        <a:cs typeface="DejaVu Sans"/>
+                      </a:endParaRPr>
                     </a:p>
                   </a:txBody>
-                  <a:tcPr marL="91440" marR="73152" marT="54864" marB="54864" anchor="ctr">
+                  <a:tcPr marR="73152" marT="54864" marB="54864" anchor="ctr">
                     <a:solidFill>
                       <a:srgbClr val="1A2332"/>
                     </a:solidFill>
@@ -4073,7 +4244,7 @@
                     <a:p>
                       <a:pPr algn="ctr"/>
                       <a:r>
-                        <a:rPr sz="1100" b="1">
+                        <a:rPr sz="1200" b="1">
                           <a:solidFill>
                             <a:srgbClr val="FFFFFF"/>
                           </a:solidFill>
@@ -4083,9 +4254,17 @@
                         </a:rPr>
                         <a:t>Commercial</a:t>
                       </a:r>
+                      <a:endParaRPr sz="1200" b="1">
+                        <a:solidFill>
+                          <a:srgbClr val="FFFFFF"/>
+                        </a:solidFill>
+                        <a:latin typeface="DejaVu Sans"/>
+                        <a:ea typeface="DejaVu Sans"/>
+                        <a:cs typeface="DejaVu Sans"/>
+                      </a:endParaRPr>
                     </a:p>
                   </a:txBody>
-                  <a:tcPr marL="91440" marR="73152" marT="54864" marB="54864" anchor="ctr">
+                  <a:tcPr marR="73152" marT="54864" marB="54864" anchor="ctr">
                     <a:solidFill>
                       <a:srgbClr val="1A2332"/>
                     </a:solidFill>
@@ -4100,7 +4279,7 @@
                     <a:p>
                       <a:pPr algn="l"/>
                       <a:r>
-                        <a:rPr sz="1100" b="1">
+                        <a:rPr sz="1200" b="1">
                           <a:solidFill>
                             <a:srgbClr val="1A2332"/>
                           </a:solidFill>
@@ -4110,9 +4289,17 @@
                         </a:rPr>
                         <a:t>Preparative buffer preparation</a:t>
                       </a:r>
+                      <a:endParaRPr sz="1200" b="1">
+                        <a:solidFill>
+                          <a:srgbClr val="1A2332"/>
+                        </a:solidFill>
+                        <a:latin typeface="DejaVu Sans"/>
+                        <a:ea typeface="DejaVu Sans"/>
+                        <a:cs typeface="DejaVu Sans"/>
+                      </a:endParaRPr>
                     </a:p>
                   </a:txBody>
-                  <a:tcPr marL="91440" marR="73152" marT="54864" marB="54864" anchor="ctr">
+                  <a:tcPr marR="73152" marT="54864" marB="54864" anchor="ctr">
                     <a:solidFill>
                       <a:srgbClr val="F7FBFB"/>
                     </a:solidFill>
@@ -4125,7 +4312,7 @@
                     <a:p>
                       <a:pPr algn="ctr"/>
                       <a:r>
-                        <a:rPr sz="1100" b="1">
+                        <a:rPr sz="1200" b="1">
                           <a:solidFill>
                             <a:srgbClr val="2D8B8B"/>
                           </a:solidFill>
@@ -4135,9 +4322,17 @@
                         </a:rPr>
                         <a:t>Option 1</a:t>
                       </a:r>
+                      <a:endParaRPr sz="1200" b="1">
+                        <a:solidFill>
+                          <a:srgbClr val="2D8B8B"/>
+                        </a:solidFill>
+                        <a:latin typeface="DejaVu Sans"/>
+                        <a:ea typeface="DejaVu Sans"/>
+                        <a:cs typeface="DejaVu Sans"/>
+                      </a:endParaRPr>
                     </a:p>
                   </a:txBody>
-                  <a:tcPr marL="91440" marR="73152" marT="54864" marB="54864" anchor="ctr">
+                  <a:tcPr marR="73152" marT="54864" marB="54864" anchor="ctr">
                     <a:solidFill>
                       <a:srgbClr val="E7F3F3"/>
                     </a:solidFill>
@@ -4150,7 +4345,7 @@
                     <a:p>
                       <a:pPr algn="ctr"/>
                       <a:r>
-                        <a:rPr sz="1100" b="1">
+                        <a:rPr sz="1200" b="1">
                           <a:solidFill>
                             <a:srgbClr val="1C2833"/>
                           </a:solidFill>
@@ -4160,9 +4355,17 @@
                         </a:rPr>
                         <a:t>Option 2</a:t>
                       </a:r>
+                      <a:endParaRPr sz="1200" b="1">
+                        <a:solidFill>
+                          <a:srgbClr val="1C2833"/>
+                        </a:solidFill>
+                        <a:latin typeface="DejaVu Sans"/>
+                        <a:ea typeface="DejaVu Sans"/>
+                        <a:cs typeface="DejaVu Sans"/>
+                      </a:endParaRPr>
                     </a:p>
                   </a:txBody>
-                  <a:tcPr marL="91440" marR="73152" marT="54864" marB="54864" anchor="ctr">
+                  <a:tcPr marR="73152" marT="54864" marB="54864" anchor="ctr">
                     <a:solidFill>
                       <a:srgbClr val="FFFFFF"/>
                     </a:solidFill>
@@ -4175,7 +4378,7 @@
                     <a:p>
                       <a:pPr algn="ctr"/>
                       <a:r>
-                        <a:rPr sz="1100" b="1">
+                        <a:rPr sz="1200" b="1">
                           <a:solidFill>
                             <a:srgbClr val="1C2833"/>
                           </a:solidFill>
@@ -4185,9 +4388,17 @@
                         </a:rPr>
                         <a:t>Option 2</a:t>
                       </a:r>
+                      <a:endParaRPr sz="1200" b="1">
+                        <a:solidFill>
+                          <a:srgbClr val="1C2833"/>
+                        </a:solidFill>
+                        <a:latin typeface="DejaVu Sans"/>
+                        <a:ea typeface="DejaVu Sans"/>
+                        <a:cs typeface="DejaVu Sans"/>
+                      </a:endParaRPr>
                     </a:p>
                   </a:txBody>
-                  <a:tcPr marL="91440" marR="73152" marT="54864" marB="54864" anchor="ctr">
+                  <a:tcPr marR="73152" marT="54864" marB="54864" anchor="ctr">
                     <a:solidFill>
                       <a:srgbClr val="FFFFFF"/>
                     </a:solidFill>
@@ -4200,7 +4411,7 @@
                     <a:p>
                       <a:pPr algn="ctr"/>
                       <a:r>
-                        <a:rPr sz="1100" b="1">
+                        <a:rPr sz="1200" b="1">
                           <a:solidFill>
                             <a:srgbClr val="1F6B4A"/>
                           </a:solidFill>
@@ -4210,9 +4421,17 @@
                         </a:rPr>
                         <a:t>Option 3</a:t>
                       </a:r>
+                      <a:endParaRPr sz="1200" b="1">
+                        <a:solidFill>
+                          <a:srgbClr val="1F6B4A"/>
+                        </a:solidFill>
+                        <a:latin typeface="DejaVu Sans"/>
+                        <a:ea typeface="DejaVu Sans"/>
+                        <a:cs typeface="DejaVu Sans"/>
+                      </a:endParaRPr>
                     </a:p>
                   </a:txBody>
-                  <a:tcPr marL="91440" marR="73152" marT="54864" marB="54864" anchor="ctr">
+                  <a:tcPr marR="73152" marT="54864" marB="54864" anchor="ctr">
                     <a:solidFill>
                       <a:srgbClr val="E8F2EA"/>
                     </a:solidFill>
@@ -4227,7 +4446,7 @@
                     <a:p>
                       <a:pPr algn="l"/>
                       <a:r>
-                        <a:rPr sz="1100" b="1">
+                        <a:rPr sz="1200" b="1">
                           <a:solidFill>
                             <a:srgbClr val="1A2332"/>
                           </a:solidFill>
@@ -4237,9 +4456,17 @@
                         </a:rPr>
                         <a:t>Preparative chromatography</a:t>
                       </a:r>
+                      <a:endParaRPr sz="1200" b="1">
+                        <a:solidFill>
+                          <a:srgbClr val="1A2332"/>
+                        </a:solidFill>
+                        <a:latin typeface="DejaVu Sans"/>
+                        <a:ea typeface="DejaVu Sans"/>
+                        <a:cs typeface="DejaVu Sans"/>
+                      </a:endParaRPr>
                     </a:p>
                   </a:txBody>
-                  <a:tcPr marL="91440" marR="73152" marT="54864" marB="54864" anchor="ctr">
+                  <a:tcPr marR="73152" marT="54864" marB="54864" anchor="ctr">
                     <a:solidFill>
                       <a:srgbClr val="F7FBFB"/>
                     </a:solidFill>
@@ -4252,7 +4479,7 @@
                     <a:p>
                       <a:pPr algn="ctr"/>
                       <a:r>
-                        <a:rPr sz="1100" b="1">
+                        <a:rPr sz="1200" b="1">
                           <a:solidFill>
                             <a:srgbClr val="2D8B8B"/>
                           </a:solidFill>
@@ -4262,9 +4489,17 @@
                         </a:rPr>
                         <a:t>Option 1</a:t>
                       </a:r>
+                      <a:endParaRPr sz="1200" b="1">
+                        <a:solidFill>
+                          <a:srgbClr val="2D8B8B"/>
+                        </a:solidFill>
+                        <a:latin typeface="DejaVu Sans"/>
+                        <a:ea typeface="DejaVu Sans"/>
+                        <a:cs typeface="DejaVu Sans"/>
+                      </a:endParaRPr>
                     </a:p>
                   </a:txBody>
-                  <a:tcPr marL="91440" marR="73152" marT="54864" marB="54864" anchor="ctr">
+                  <a:tcPr marR="73152" marT="54864" marB="54864" anchor="ctr">
                     <a:solidFill>
                       <a:srgbClr val="E7F3F3"/>
                     </a:solidFill>
@@ -4277,7 +4512,7 @@
                     <a:p>
                       <a:pPr algn="ctr"/>
                       <a:r>
-                        <a:rPr sz="1100" b="1">
+                        <a:rPr sz="1200" b="1">
                           <a:solidFill>
                             <a:srgbClr val="1C2833"/>
                           </a:solidFill>
@@ -4287,9 +4522,17 @@
                         </a:rPr>
                         <a:t>Option 2</a:t>
                       </a:r>
+                      <a:endParaRPr sz="1200" b="1">
+                        <a:solidFill>
+                          <a:srgbClr val="1C2833"/>
+                        </a:solidFill>
+                        <a:latin typeface="DejaVu Sans"/>
+                        <a:ea typeface="DejaVu Sans"/>
+                        <a:cs typeface="DejaVu Sans"/>
+                      </a:endParaRPr>
                     </a:p>
                   </a:txBody>
-                  <a:tcPr marL="91440" marR="73152" marT="54864" marB="54864" anchor="ctr">
+                  <a:tcPr marR="73152" marT="54864" marB="54864" anchor="ctr">
                     <a:solidFill>
                       <a:srgbClr val="FFFFFF"/>
                     </a:solidFill>
@@ -4302,7 +4545,7 @@
                     <a:p>
                       <a:pPr algn="ctr"/>
                       <a:r>
-                        <a:rPr sz="1100" b="1">
+                        <a:rPr sz="1200" b="1">
                           <a:solidFill>
                             <a:srgbClr val="1C2833"/>
                           </a:solidFill>
@@ -4312,9 +4555,17 @@
                         </a:rPr>
                         <a:t>Option 2</a:t>
                       </a:r>
+                      <a:endParaRPr sz="1200" b="1">
+                        <a:solidFill>
+                          <a:srgbClr val="1C2833"/>
+                        </a:solidFill>
+                        <a:latin typeface="DejaVu Sans"/>
+                        <a:ea typeface="DejaVu Sans"/>
+                        <a:cs typeface="DejaVu Sans"/>
+                      </a:endParaRPr>
                     </a:p>
                   </a:txBody>
-                  <a:tcPr marL="91440" marR="73152" marT="54864" marB="54864" anchor="ctr">
+                  <a:tcPr marR="73152" marT="54864" marB="54864" anchor="ctr">
                     <a:solidFill>
                       <a:srgbClr val="FFFFFF"/>
                     </a:solidFill>
@@ -4327,7 +4578,7 @@
                     <a:p>
                       <a:pPr algn="ctr"/>
                       <a:r>
-                        <a:rPr sz="1100" b="1">
+                        <a:rPr sz="1200" b="1">
                           <a:solidFill>
                             <a:srgbClr val="1F6B4A"/>
                           </a:solidFill>
@@ -4337,9 +4588,17 @@
                         </a:rPr>
                         <a:t>Option 3</a:t>
                       </a:r>
+                      <a:endParaRPr sz="1200" b="1">
+                        <a:solidFill>
+                          <a:srgbClr val="1F6B4A"/>
+                        </a:solidFill>
+                        <a:latin typeface="DejaVu Sans"/>
+                        <a:ea typeface="DejaVu Sans"/>
+                        <a:cs typeface="DejaVu Sans"/>
+                      </a:endParaRPr>
                     </a:p>
                   </a:txBody>
-                  <a:tcPr marL="91440" marR="73152" marT="54864" marB="54864" anchor="ctr">
+                  <a:tcPr marR="73152" marT="54864" marB="54864" anchor="ctr">
                     <a:solidFill>
                       <a:srgbClr val="E8F2EA"/>
                     </a:solidFill>
@@ -4354,7 +4613,7 @@
                     <a:p>
                       <a:pPr algn="l"/>
                       <a:r>
-                        <a:rPr sz="1100" b="1">
+                        <a:rPr sz="1200" b="1">
                           <a:solidFill>
                             <a:srgbClr val="1A2332"/>
                           </a:solidFill>
@@ -4364,9 +4623,17 @@
                         </a:rPr>
                         <a:t>TFF</a:t>
                       </a:r>
+                      <a:endParaRPr sz="1200" b="1">
+                        <a:solidFill>
+                          <a:srgbClr val="1A2332"/>
+                        </a:solidFill>
+                        <a:latin typeface="DejaVu Sans"/>
+                        <a:ea typeface="DejaVu Sans"/>
+                        <a:cs typeface="DejaVu Sans"/>
+                      </a:endParaRPr>
                     </a:p>
                   </a:txBody>
-                  <a:tcPr marL="91440" marR="73152" marT="54864" marB="54864" anchor="ctr">
+                  <a:tcPr marR="73152" marT="54864" marB="54864" anchor="ctr">
                     <a:solidFill>
                       <a:srgbClr val="F7FBFB"/>
                     </a:solidFill>
@@ -4379,7 +4646,7 @@
                     <a:p>
                       <a:pPr algn="ctr"/>
                       <a:r>
-                        <a:rPr sz="1100" b="1">
+                        <a:rPr sz="1200" b="1">
                           <a:solidFill>
                             <a:srgbClr val="2D8B8B"/>
                           </a:solidFill>
@@ -4389,9 +4656,17 @@
                         </a:rPr>
                         <a:t>Option 1</a:t>
                       </a:r>
+                      <a:endParaRPr sz="1200" b="1">
+                        <a:solidFill>
+                          <a:srgbClr val="2D8B8B"/>
+                        </a:solidFill>
+                        <a:latin typeface="DejaVu Sans"/>
+                        <a:ea typeface="DejaVu Sans"/>
+                        <a:cs typeface="DejaVu Sans"/>
+                      </a:endParaRPr>
                     </a:p>
                   </a:txBody>
-                  <a:tcPr marL="91440" marR="73152" marT="54864" marB="54864" anchor="ctr">
+                  <a:tcPr marR="73152" marT="54864" marB="54864" anchor="ctr">
                     <a:solidFill>
                       <a:srgbClr val="E7F3F3"/>
                     </a:solidFill>
@@ -4404,7 +4679,7 @@
                     <a:p>
                       <a:pPr algn="ctr"/>
                       <a:r>
-                        <a:rPr sz="1100" b="1">
+                        <a:rPr sz="1200" b="1">
                           <a:solidFill>
                             <a:srgbClr val="1C2833"/>
                           </a:solidFill>
@@ -4414,9 +4689,17 @@
                         </a:rPr>
                         <a:t>Option 2</a:t>
                       </a:r>
+                      <a:endParaRPr sz="1200" b="1">
+                        <a:solidFill>
+                          <a:srgbClr val="1C2833"/>
+                        </a:solidFill>
+                        <a:latin typeface="DejaVu Sans"/>
+                        <a:ea typeface="DejaVu Sans"/>
+                        <a:cs typeface="DejaVu Sans"/>
+                      </a:endParaRPr>
                     </a:p>
                   </a:txBody>
-                  <a:tcPr marL="91440" marR="73152" marT="54864" marB="54864" anchor="ctr">
+                  <a:tcPr marR="73152" marT="54864" marB="54864" anchor="ctr">
                     <a:solidFill>
                       <a:srgbClr val="FFFFFF"/>
                     </a:solidFill>
@@ -4429,7 +4712,7 @@
                     <a:p>
                       <a:pPr algn="ctr"/>
                       <a:r>
-                        <a:rPr sz="1100" b="1">
+                        <a:rPr sz="1200" b="1">
                           <a:solidFill>
                             <a:srgbClr val="1C2833"/>
                           </a:solidFill>
@@ -4439,9 +4722,17 @@
                         </a:rPr>
                         <a:t>Option 2</a:t>
                       </a:r>
+                      <a:endParaRPr sz="1200" b="1">
+                        <a:solidFill>
+                          <a:srgbClr val="1C2833"/>
+                        </a:solidFill>
+                        <a:latin typeface="DejaVu Sans"/>
+                        <a:ea typeface="DejaVu Sans"/>
+                        <a:cs typeface="DejaVu Sans"/>
+                      </a:endParaRPr>
                     </a:p>
                   </a:txBody>
-                  <a:tcPr marL="91440" marR="73152" marT="54864" marB="54864" anchor="ctr">
+                  <a:tcPr marR="73152" marT="54864" marB="54864" anchor="ctr">
                     <a:solidFill>
                       <a:srgbClr val="FFFFFF"/>
                     </a:solidFill>
@@ -4454,7 +4745,7 @@
                     <a:p>
                       <a:pPr algn="ctr"/>
                       <a:r>
-                        <a:rPr sz="1100" b="1">
+                        <a:rPr sz="1200" b="1">
                           <a:solidFill>
                             <a:srgbClr val="1F6B4A"/>
                           </a:solidFill>
@@ -4464,9 +4755,17 @@
                         </a:rPr>
                         <a:t>Option 3</a:t>
                       </a:r>
+                      <a:endParaRPr sz="1200" b="1">
+                        <a:solidFill>
+                          <a:srgbClr val="1F6B4A"/>
+                        </a:solidFill>
+                        <a:latin typeface="DejaVu Sans"/>
+                        <a:ea typeface="DejaVu Sans"/>
+                        <a:cs typeface="DejaVu Sans"/>
+                      </a:endParaRPr>
                     </a:p>
                   </a:txBody>
-                  <a:tcPr marL="91440" marR="73152" marT="54864" marB="54864" anchor="ctr">
+                  <a:tcPr marR="73152" marT="54864" marB="54864" anchor="ctr">
                     <a:solidFill>
                       <a:srgbClr val="E8F2EA"/>
                     </a:solidFill>
@@ -4481,7 +4780,7 @@
                     <a:p>
                       <a:pPr algn="l"/>
                       <a:r>
-                        <a:rPr sz="1100" b="1">
+                        <a:rPr sz="1200" b="1">
                           <a:solidFill>
                             <a:srgbClr val="1A2332"/>
                           </a:solidFill>
@@ -4491,9 +4790,17 @@
                         </a:rPr>
                         <a:t>Precipitation</a:t>
                       </a:r>
+                      <a:endParaRPr sz="1200" b="1">
+                        <a:solidFill>
+                          <a:srgbClr val="1A2332"/>
+                        </a:solidFill>
+                        <a:latin typeface="DejaVu Sans"/>
+                        <a:ea typeface="DejaVu Sans"/>
+                        <a:cs typeface="DejaVu Sans"/>
+                      </a:endParaRPr>
                     </a:p>
                   </a:txBody>
-                  <a:tcPr marL="91440" marR="73152" marT="54864" marB="54864" anchor="ctr">
+                  <a:tcPr marR="73152" marT="54864" marB="54864" anchor="ctr">
                     <a:solidFill>
                       <a:srgbClr val="F7FBFB"/>
                     </a:solidFill>
@@ -4506,7 +4813,7 @@
                     <a:p>
                       <a:pPr algn="ctr"/>
                       <a:r>
-                        <a:rPr sz="1100" b="1">
+                        <a:rPr sz="1200" b="1">
                           <a:solidFill>
                             <a:srgbClr val="2D8B8B"/>
                           </a:solidFill>
@@ -4516,9 +4823,17 @@
                         </a:rPr>
                         <a:t>Option 1</a:t>
                       </a:r>
+                      <a:endParaRPr sz="1200" b="1">
+                        <a:solidFill>
+                          <a:srgbClr val="2D8B8B"/>
+                        </a:solidFill>
+                        <a:latin typeface="DejaVu Sans"/>
+                        <a:ea typeface="DejaVu Sans"/>
+                        <a:cs typeface="DejaVu Sans"/>
+                      </a:endParaRPr>
                     </a:p>
                   </a:txBody>
-                  <a:tcPr marL="91440" marR="73152" marT="54864" marB="54864" anchor="ctr">
+                  <a:tcPr marR="73152" marT="54864" marB="54864" anchor="ctr">
                     <a:solidFill>
                       <a:srgbClr val="E7F3F3"/>
                     </a:solidFill>
@@ -4531,7 +4846,7 @@
                     <a:p>
                       <a:pPr algn="ctr"/>
                       <a:r>
-                        <a:rPr sz="1100" b="1">
+                        <a:rPr sz="1200" b="1">
                           <a:solidFill>
                             <a:srgbClr val="1C2833"/>
                           </a:solidFill>
@@ -4541,9 +4856,17 @@
                         </a:rPr>
                         <a:t>Option 2</a:t>
                       </a:r>
+                      <a:endParaRPr sz="1200" b="1">
+                        <a:solidFill>
+                          <a:srgbClr val="1C2833"/>
+                        </a:solidFill>
+                        <a:latin typeface="DejaVu Sans"/>
+                        <a:ea typeface="DejaVu Sans"/>
+                        <a:cs typeface="DejaVu Sans"/>
+                      </a:endParaRPr>
                     </a:p>
                   </a:txBody>
-                  <a:tcPr marL="91440" marR="73152" marT="54864" marB="54864" anchor="ctr">
+                  <a:tcPr marR="73152" marT="54864" marB="54864" anchor="ctr">
                     <a:solidFill>
                       <a:srgbClr val="FFFFFF"/>
                     </a:solidFill>
@@ -4556,7 +4879,7 @@
                     <a:p>
                       <a:pPr algn="ctr"/>
                       <a:r>
-                        <a:rPr sz="1100" b="1">
+                        <a:rPr sz="1200" b="1">
                           <a:solidFill>
                             <a:srgbClr val="1C2833"/>
                           </a:solidFill>
@@ -4566,9 +4889,17 @@
                         </a:rPr>
                         <a:t>Option 2</a:t>
                       </a:r>
+                      <a:endParaRPr sz="1200" b="1">
+                        <a:solidFill>
+                          <a:srgbClr val="1C2833"/>
+                        </a:solidFill>
+                        <a:latin typeface="DejaVu Sans"/>
+                        <a:ea typeface="DejaVu Sans"/>
+                        <a:cs typeface="DejaVu Sans"/>
+                      </a:endParaRPr>
                     </a:p>
                   </a:txBody>
-                  <a:tcPr marL="91440" marR="73152" marT="54864" marB="54864" anchor="ctr">
+                  <a:tcPr marR="73152" marT="54864" marB="54864" anchor="ctr">
                     <a:solidFill>
                       <a:srgbClr val="FFFFFF"/>
                     </a:solidFill>
@@ -4581,7 +4912,7 @@
                     <a:p>
                       <a:pPr algn="ctr"/>
                       <a:r>
-                        <a:rPr sz="1100" b="1">
+                        <a:rPr sz="1200" b="1">
                           <a:solidFill>
                             <a:srgbClr val="1F6B4A"/>
                           </a:solidFill>
@@ -4591,9 +4922,17 @@
                         </a:rPr>
                         <a:t>Option 3</a:t>
                       </a:r>
+                      <a:endParaRPr sz="1200" b="1">
+                        <a:solidFill>
+                          <a:srgbClr val="1F6B4A"/>
+                        </a:solidFill>
+                        <a:latin typeface="DejaVu Sans"/>
+                        <a:ea typeface="DejaVu Sans"/>
+                        <a:cs typeface="DejaVu Sans"/>
+                      </a:endParaRPr>
                     </a:p>
                   </a:txBody>
-                  <a:tcPr marL="91440" marR="73152" marT="54864" marB="54864" anchor="ctr">
+                  <a:tcPr marR="73152" marT="54864" marB="54864" anchor="ctr">
                     <a:solidFill>
                       <a:srgbClr val="E8F2EA"/>
                     </a:solidFill>
@@ -4621,7 +4960,7 @@
           <a:noFill/>
         </p:spPr>
         <p:txBody>
-          <a:bodyPr wrap="square" lIns="0" rIns="0" tIns="0" bIns="0" anchor="t"/>
+          <a:bodyPr wrap="square" lIns="0" tIns="0" rIns="0" bIns="0" anchor="t"/>
           <a:lstStyle/>
           <a:p>
             <a:pPr algn="l">
@@ -4643,6 +4982,14 @@
               </a:rPr>
               <a:t>139788 Step 3  ·  Dead-leg and hold-up retrofit</a:t>
             </a:r>
+            <a:endParaRPr sz="1000" b="0">
+              <a:solidFill>
+                <a:srgbClr val="5D6D7E"/>
+              </a:solidFill>
+              <a:latin typeface="DejaVu Sans"/>
+              <a:ea typeface="DejaVu Sans"/>
+              <a:cs typeface="DejaVu Sans"/>
+            </a:endParaRPr>
           </a:p>
         </p:txBody>
       </p:sp>
@@ -4970,6 +5317,10 @@
       </a:style>
     </a:lnDef>
   </a:objectDefaults>
-  <a:extraClrSchemeLst/>
+  <a:extLst>
+    <a:ext uri="{05A4C25C-085E-4340-85A3-A5531E510DB2}">
+      <thm15:themeFamily xmlns:thm15="http://schemas.microsoft.com/office/thememl/2012/main" name="Office Theme" id="{62F939B6-93AF-4DB8-9C6B-D6C7DFDC589F}" vid="{4A3C46E8-61CC-4603-A589-7422A47A8E4A}"/>
+    </a:ext>
+  </a:extLst>
 </a:theme>
 </file>
--- a/139788 Step 3 Dead-leg and Hold-up Retrofit_EN_1page.pptx
+++ b/139788 Step 3 Dead-leg and Hold-up Retrofit_EN_1page.pptx
@@ -3757,7 +3757,7 @@
                           <a:ea typeface="DejaVu Sans"/>
                           <a:cs typeface="Calibri" panose="020F0502020204030204" charset="0"/>
                         </a:rPr>
-                        <a:t>New change control, with a concern for product quality. Pre-use and post-use steps may still be insufficient.</a:t>
+                        <a:t>New change control, with a concern for product quality. The risk assessment of pre-use and post-use operations is not yet sufficient.</a:t>
                       </a:r>
                       <a:endParaRPr sz="1300" b="0">
                         <a:solidFill>

--- a/139788 Step 3 Dead-leg and Hold-up Retrofit_EN_1page.pptx
+++ b/139788 Step 3 Dead-leg and Hold-up Retrofit_EN_1page.pptx
@@ -3258,7 +3258,7 @@
           <p:nvPr/>
         </p:nvGraphicFramePr>
         <p:xfrm>
-          <a:off x="292608" y="804672"/>
+          <a:off x="292608" y="713232"/>
           <a:ext cx="11612880" cy="4114800"/>
         </p:xfrm>
         <a:graphic>
@@ -3514,7 +3514,10 @@
                     <a:bodyPr wrap="square"/>
                     <a:lstStyle/>
                     <a:p>
-                      <a:pPr algn="l"/>
+                      <a:pPr marL="342900" indent="-342900" algn="l">
+                        <a:buFont typeface="+mj-lt"/>
+                        <a:buAutoNum type="arabicPeriod"/>
+                      </a:pPr>
                       <a:r>
                         <a:rPr sz="1300" b="0">
                           <a:solidFill>
@@ -3524,7 +3527,79 @@
                           <a:ea typeface="DejaVu Sans"/>
                           <a:cs typeface="Calibri" panose="020F0502020204030204" charset="0"/>
                         </a:rPr>
-                        <a:t>Dead legs outside the 2D/3D criterion, diaphragm valves that are not self-draining, and non-BPE piping stay in place.</a:t>
+                        <a:t>Dead legs outside the 2D/3D criterion, </a:t>
+                      </a:r>
+                      <a:endParaRPr sz="1300" b="0">
+                        <a:solidFill>
+                          <a:srgbClr val="1C2833"/>
+                        </a:solidFill>
+                        <a:latin typeface="Calibri" panose="020F0502020204030204" charset="0"/>
+                        <a:ea typeface="DejaVu Sans"/>
+                        <a:cs typeface="Calibri" panose="020F0502020204030204" charset="0"/>
+                      </a:endParaRPr>
+                    </a:p>
+                    <a:p>
+                      <a:pPr marL="342900" indent="-342900" algn="l">
+                        <a:buFont typeface="+mj-lt"/>
+                        <a:buAutoNum type="arabicPeriod"/>
+                      </a:pPr>
+                      <a:r>
+                        <a:rPr lang="en-US" sz="1300" b="0">
+                          <a:solidFill>
+                            <a:srgbClr val="1C2833"/>
+                          </a:solidFill>
+                          <a:latin typeface="Calibri" panose="020F0502020204030204" charset="0"/>
+                          <a:ea typeface="DejaVu Sans"/>
+                          <a:cs typeface="Calibri" panose="020F0502020204030204" charset="0"/>
+                        </a:rPr>
+                        <a:t>D</a:t>
+                      </a:r>
+                      <a:r>
+                        <a:rPr sz="1300" b="0">
+                          <a:solidFill>
+                            <a:srgbClr val="1C2833"/>
+                          </a:solidFill>
+                          <a:latin typeface="Calibri" panose="020F0502020204030204" charset="0"/>
+                          <a:ea typeface="DejaVu Sans"/>
+                          <a:cs typeface="Calibri" panose="020F0502020204030204" charset="0"/>
+                        </a:rPr>
+                        <a:t>iaphragm valves that are not self-draining, </a:t>
+                      </a:r>
+                      <a:endParaRPr sz="1300" b="0">
+                        <a:solidFill>
+                          <a:srgbClr val="1C2833"/>
+                        </a:solidFill>
+                        <a:latin typeface="Calibri" panose="020F0502020204030204" charset="0"/>
+                        <a:ea typeface="DejaVu Sans"/>
+                        <a:cs typeface="Calibri" panose="020F0502020204030204" charset="0"/>
+                      </a:endParaRPr>
+                    </a:p>
+                    <a:p>
+                      <a:pPr marL="342900" indent="-342900" algn="l">
+                        <a:buFont typeface="+mj-lt"/>
+                        <a:buAutoNum type="arabicPeriod"/>
+                      </a:pPr>
+                      <a:r>
+                        <a:rPr lang="en-US" sz="1300" b="0">
+                          <a:solidFill>
+                            <a:srgbClr val="1C2833"/>
+                          </a:solidFill>
+                          <a:latin typeface="Calibri" panose="020F0502020204030204" charset="0"/>
+                          <a:ea typeface="DejaVu Sans"/>
+                          <a:cs typeface="Calibri" panose="020F0502020204030204" charset="0"/>
+                        </a:rPr>
+                        <a:t>N</a:t>
+                      </a:r>
+                      <a:r>
+                        <a:rPr sz="1300" b="0">
+                          <a:solidFill>
+                            <a:srgbClr val="1C2833"/>
+                          </a:solidFill>
+                          <a:latin typeface="Calibri" panose="020F0502020204030204" charset="0"/>
+                          <a:ea typeface="DejaVu Sans"/>
+                          <a:cs typeface="Calibri" panose="020F0502020204030204" charset="0"/>
+                        </a:rPr>
+                        <a:t>on-BPE piping stay in place.</a:t>
                       </a:r>
                       <a:endParaRPr sz="1300" b="0">
                         <a:solidFill>
@@ -3547,7 +3622,9 @@
                     <a:bodyPr wrap="square"/>
                     <a:lstStyle/>
                     <a:p>
-                      <a:pPr algn="l"/>
+                      <a:pPr marL="342900" indent="-342900" algn="l">
+                        <a:buAutoNum type="arabicPeriod"/>
+                      </a:pPr>
                       <a:r>
                         <a:rPr sz="1300" b="0">
                           <a:solidFill>
@@ -3557,7 +3634,31 @@
                           <a:ea typeface="DejaVu Sans"/>
                           <a:cs typeface="Calibri" panose="020F0502020204030204" charset="0"/>
                         </a:rPr>
-                        <a:t>Hold-up can degrade material, support microbial growth, or cause cross-contamination. Flush, drain, purge, and disassembly after each use are not defined.</a:t>
+                        <a:t>Hold-up can degrade material, support microbial growth, or cause cross-contamination. </a:t>
+                      </a:r>
+                      <a:endParaRPr sz="1300" b="0">
+                        <a:solidFill>
+                          <a:srgbClr val="1C2833"/>
+                        </a:solidFill>
+                        <a:latin typeface="Calibri" panose="020F0502020204030204" charset="0"/>
+                        <a:ea typeface="DejaVu Sans"/>
+                        <a:cs typeface="Calibri" panose="020F0502020204030204" charset="0"/>
+                      </a:endParaRPr>
+                    </a:p>
+                    <a:p>
+                      <a:pPr marL="342900" indent="-342900" algn="l">
+                        <a:buAutoNum type="arabicPeriod"/>
+                      </a:pPr>
+                      <a:r>
+                        <a:rPr sz="1300" b="0">
+                          <a:solidFill>
+                            <a:srgbClr val="1C2833"/>
+                          </a:solidFill>
+                          <a:latin typeface="Calibri" panose="020F0502020204030204" charset="0"/>
+                          <a:ea typeface="DejaVu Sans"/>
+                          <a:cs typeface="Calibri" panose="020F0502020204030204" charset="0"/>
+                        </a:rPr>
+                        <a:t>Flush, drain, purge, and disassembly after each use are not defined.</a:t>
                       </a:r>
                       <a:endParaRPr sz="1300" b="0">
                         <a:solidFill>
@@ -3580,7 +3681,9 @@
                     <a:bodyPr wrap="square"/>
                     <a:lstStyle/>
                     <a:p>
-                      <a:pPr algn="l"/>
+                      <a:pPr marL="342900" indent="-342900" algn="l">
+                        <a:buAutoNum type="arabicPeriod"/>
+                      </a:pPr>
                       <a:r>
                         <a:rPr sz="1300" b="0">
                           <a:solidFill>
@@ -3590,7 +3693,31 @@
                           <a:ea typeface="DejaVu Sans"/>
                           <a:cs typeface="Calibri" panose="020F0502020204030204" charset="0"/>
                         </a:rPr>
-                        <a:t>After each system transfer, flush or clean with process solvent, supported by bioburden data. Define those steps in the procedures.</a:t>
+                        <a:t>After each system transfer, flush or clean with process solvent, supported by bioburden data. </a:t>
+                      </a:r>
+                      <a:endParaRPr sz="1300" b="0">
+                        <a:solidFill>
+                          <a:srgbClr val="1C2833"/>
+                        </a:solidFill>
+                        <a:latin typeface="Calibri" panose="020F0502020204030204" charset="0"/>
+                        <a:ea typeface="DejaVu Sans"/>
+                        <a:cs typeface="Calibri" panose="020F0502020204030204" charset="0"/>
+                      </a:endParaRPr>
+                    </a:p>
+                    <a:p>
+                      <a:pPr marL="342900" indent="-342900" algn="l">
+                        <a:buAutoNum type="arabicPeriod"/>
+                      </a:pPr>
+                      <a:r>
+                        <a:rPr sz="1300" b="0">
+                          <a:solidFill>
+                            <a:srgbClr val="1C2833"/>
+                          </a:solidFill>
+                          <a:latin typeface="Calibri" panose="020F0502020204030204" charset="0"/>
+                          <a:ea typeface="DejaVu Sans"/>
+                          <a:cs typeface="Calibri" panose="020F0502020204030204" charset="0"/>
+                        </a:rPr>
+                        <a:t>Define those steps in the procedures.</a:t>
                       </a:r>
                       <a:endParaRPr sz="1300" b="0">
                         <a:solidFill>
@@ -3747,7 +3874,9 @@
                     <a:bodyPr wrap="square"/>
                     <a:lstStyle/>
                     <a:p>
-                      <a:pPr algn="l"/>
+                      <a:pPr marL="342900" indent="-342900" algn="l">
+                        <a:buAutoNum type="arabicPeriod"/>
+                      </a:pPr>
                       <a:r>
                         <a:rPr sz="1300" b="0">
                           <a:solidFill>
@@ -3757,7 +3886,31 @@
                           <a:ea typeface="DejaVu Sans"/>
                           <a:cs typeface="Calibri" panose="020F0502020204030204" charset="0"/>
                         </a:rPr>
-                        <a:t>New change control, with a concern for product quality. The risk assessment of pre-use and post-use operations is not yet sufficient.</a:t>
+                        <a:t>New change control, with a concern for product quality. </a:t>
+                      </a:r>
+                      <a:endParaRPr sz="1300" b="0">
+                        <a:solidFill>
+                          <a:srgbClr val="1C2833"/>
+                        </a:solidFill>
+                        <a:latin typeface="Calibri" panose="020F0502020204030204" charset="0"/>
+                        <a:ea typeface="DejaVu Sans"/>
+                        <a:cs typeface="Calibri" panose="020F0502020204030204" charset="0"/>
+                      </a:endParaRPr>
+                    </a:p>
+                    <a:p>
+                      <a:pPr marL="342900" indent="-342900" algn="l">
+                        <a:buAutoNum type="arabicPeriod"/>
+                      </a:pPr>
+                      <a:r>
+                        <a:rPr sz="1300" b="0">
+                          <a:solidFill>
+                            <a:srgbClr val="1C2833"/>
+                          </a:solidFill>
+                          <a:latin typeface="Calibri" panose="020F0502020204030204" charset="0"/>
+                          <a:ea typeface="DejaVu Sans"/>
+                          <a:cs typeface="Calibri" panose="020F0502020204030204" charset="0"/>
+                        </a:rPr>
+                        <a:t>The risk assessment of pre-use and post-use operations is not yet sufficient.</a:t>
                       </a:r>
                       <a:endParaRPr sz="1300" b="0">
                         <a:solidFill>
@@ -3780,7 +3933,9 @@
                     <a:bodyPr wrap="square"/>
                     <a:lstStyle/>
                     <a:p>
-                      <a:pPr algn="l"/>
+                      <a:pPr marL="342900" indent="-342900" algn="l">
+                        <a:buAutoNum type="arabicPeriod"/>
+                      </a:pPr>
                       <a:r>
                         <a:rPr sz="1300" b="0">
                           <a:solidFill>
@@ -3790,7 +3945,31 @@
                           <a:ea typeface="DejaVu Sans"/>
                           <a:cs typeface="Calibri" panose="020F0502020204030204" charset="0"/>
                         </a:rPr>
-                        <a:t>Qualify the modified piping. Define the operating and cleaning sequence and update the records.</a:t>
+                        <a:t>Qualify the modified piping. </a:t>
+                      </a:r>
+                      <a:endParaRPr sz="1300" b="0">
+                        <a:solidFill>
+                          <a:srgbClr val="1C2833"/>
+                        </a:solidFill>
+                        <a:latin typeface="Calibri" panose="020F0502020204030204" charset="0"/>
+                        <a:ea typeface="DejaVu Sans"/>
+                        <a:cs typeface="Calibri" panose="020F0502020204030204" charset="0"/>
+                      </a:endParaRPr>
+                    </a:p>
+                    <a:p>
+                      <a:pPr marL="342900" indent="-342900" algn="l">
+                        <a:buAutoNum type="arabicPeriod"/>
+                      </a:pPr>
+                      <a:r>
+                        <a:rPr sz="1300" b="0">
+                          <a:solidFill>
+                            <a:srgbClr val="1C2833"/>
+                          </a:solidFill>
+                          <a:latin typeface="Calibri" panose="020F0502020204030204" charset="0"/>
+                          <a:ea typeface="DejaVu Sans"/>
+                          <a:cs typeface="Calibri" panose="020F0502020204030204" charset="0"/>
+                        </a:rPr>
+                        <a:t>Define the operating and cleaning sequence and update the records.</a:t>
                       </a:r>
                       <a:endParaRPr sz="1300" b="0">
                         <a:solidFill>
@@ -3947,7 +4126,9 @@
                     <a:bodyPr wrap="square"/>
                     <a:lstStyle/>
                     <a:p>
-                      <a:pPr algn="l"/>
+                      <a:pPr marL="342900" indent="-342900" algn="l">
+                        <a:buAutoNum type="arabicPeriod"/>
+                      </a:pPr>
                       <a:r>
                         <a:rPr sz="1300" b="0">
                           <a:solidFill>
@@ -3957,7 +4138,42 @@
                           <a:ea typeface="DejaVu Sans"/>
                           <a:cs typeface="Calibri" panose="020F0502020204030204" charset="0"/>
                         </a:rPr>
-                        <a:t>The design may be incomplete, and the CIP sequence and controls may be incomplete.</a:t>
+                        <a:t>The design may be incomplete, </a:t>
+                      </a:r>
+                      <a:endParaRPr sz="1300" b="0">
+                        <a:solidFill>
+                          <a:srgbClr val="1C2833"/>
+                        </a:solidFill>
+                        <a:latin typeface="Calibri" panose="020F0502020204030204" charset="0"/>
+                        <a:ea typeface="DejaVu Sans"/>
+                        <a:cs typeface="Calibri" panose="020F0502020204030204" charset="0"/>
+                      </a:endParaRPr>
+                    </a:p>
+                    <a:p>
+                      <a:pPr marL="342900" indent="-342900" algn="l">
+                        <a:buAutoNum type="arabicPeriod"/>
+                      </a:pPr>
+                      <a:r>
+                        <a:rPr lang="en-US" sz="1300" b="0">
+                          <a:solidFill>
+                            <a:srgbClr val="1C2833"/>
+                          </a:solidFill>
+                          <a:latin typeface="Calibri" panose="020F0502020204030204" charset="0"/>
+                          <a:ea typeface="DejaVu Sans"/>
+                          <a:cs typeface="Calibri" panose="020F0502020204030204" charset="0"/>
+                        </a:rPr>
+                        <a:t>T</a:t>
+                      </a:r>
+                      <a:r>
+                        <a:rPr sz="1300" b="0">
+                          <a:solidFill>
+                            <a:srgbClr val="1C2833"/>
+                          </a:solidFill>
+                          <a:latin typeface="Calibri" panose="020F0502020204030204" charset="0"/>
+                          <a:ea typeface="DejaVu Sans"/>
+                          <a:cs typeface="Calibri" panose="020F0502020204030204" charset="0"/>
+                        </a:rPr>
+                        <a:t>he CIP sequence and controls may be incomplete.</a:t>
                       </a:r>
                       <a:endParaRPr sz="1300" b="0">
                         <a:solidFill>
@@ -3980,7 +4196,9 @@
                     <a:bodyPr wrap="square"/>
                     <a:lstStyle/>
                     <a:p>
-                      <a:pPr algn="l"/>
+                      <a:pPr marL="342900" indent="-342900" algn="l">
+                        <a:buAutoNum type="arabicPeriod"/>
+                      </a:pPr>
                       <a:r>
                         <a:rPr sz="1300" b="0">
                           <a:solidFill>
@@ -3990,7 +4208,31 @@
                           <a:ea typeface="DejaVu Sans"/>
                           <a:cs typeface="Calibri" panose="020F0502020204030204" charset="0"/>
                         </a:rPr>
-                        <a:t>Qualify the system as a whole. Update the SOP and bring the requirements into routine use.</a:t>
+                        <a:t>Qualify the system as a whole. </a:t>
+                      </a:r>
+                      <a:endParaRPr sz="1300" b="0">
+                        <a:solidFill>
+                          <a:srgbClr val="1C2833"/>
+                        </a:solidFill>
+                        <a:latin typeface="Calibri" panose="020F0502020204030204" charset="0"/>
+                        <a:ea typeface="DejaVu Sans"/>
+                        <a:cs typeface="Calibri" panose="020F0502020204030204" charset="0"/>
+                      </a:endParaRPr>
+                    </a:p>
+                    <a:p>
+                      <a:pPr marL="342900" indent="-342900" algn="l">
+                        <a:buAutoNum type="arabicPeriod"/>
+                      </a:pPr>
+                      <a:r>
+                        <a:rPr sz="1300" b="0">
+                          <a:solidFill>
+                            <a:srgbClr val="1C2833"/>
+                          </a:solidFill>
+                          <a:latin typeface="Calibri" panose="020F0502020204030204" charset="0"/>
+                          <a:ea typeface="DejaVu Sans"/>
+                          <a:cs typeface="Calibri" panose="020F0502020204030204" charset="0"/>
+                        </a:rPr>
+                        <a:t>Update the SOP and bring the requirements into routine use.</a:t>
                       </a:r>
                       <a:endParaRPr sz="1300" b="0">
                         <a:solidFill>
